--- a/inji-training-deck/Inji-Key-Manager-Deep-Dive-Dataprev-Day1.pptx
+++ b/inji-training-deck/Inji-Key-Manager-Deep-Dive-Dataprev-Day1.pptx
@@ -25128,9 +25128,9 @@
           <a:prstGeom prst="line">
             <a:avLst/>
           </a:prstGeom>
-          <a:ln w="13970">
+          <a:ln w="20320">
             <a:solidFill>
-              <a:srgbClr val="E4EAF1"/>
+              <a:srgbClr val="7C90A6"/>
             </a:solidFill>
             <a:prstDash val="sysDash"/>
           </a:ln>
@@ -25153,7 +25153,95 @@
       </p:cxnSp>
       <p:sp>
         <p:nvSpPr>
-          <p:cNvPr id="51" name="Rounded Rectangle 50"/>
+          <p:cNvPr id="51" name="Rectangle 50"/>
+          <p:cNvSpPr/>
+          <p:nvPr/>
+        </p:nvSpPr>
+        <p:spPr>
+          <a:xfrm>
+            <a:off x="1855431" y="3913632"/>
+            <a:ext cx="91440" cy="50292"/>
+          </a:xfrm>
+          <a:prstGeom prst="rect">
+            <a:avLst/>
+          </a:prstGeom>
+          <a:solidFill>
+            <a:srgbClr val="7C90A6"/>
+          </a:solidFill>
+          <a:ln>
+            <a:noFill/>
+          </a:ln>
+          <a:effectLst/>
+        </p:spPr>
+        <p:style>
+          <a:lnRef idx="1">
+            <a:schemeClr val="accent1"/>
+          </a:lnRef>
+          <a:fillRef idx="3">
+            <a:schemeClr val="accent1"/>
+          </a:fillRef>
+          <a:effectRef idx="2">
+            <a:schemeClr val="accent1"/>
+          </a:effectRef>
+          <a:fontRef idx="minor">
+            <a:schemeClr val="lt1"/>
+          </a:fontRef>
+        </p:style>
+        <p:txBody>
+          <a:bodyPr rtlCol="0" anchor="ctr"/>
+          <a:lstStyle/>
+          <a:p>
+            <a:pPr algn="ctr"/>
+          </a:p>
+        </p:txBody>
+      </p:sp>
+      <p:sp>
+        <p:nvSpPr>
+          <p:cNvPr id="52" name="Rectangle 51"/>
+          <p:cNvSpPr/>
+          <p:nvPr/>
+        </p:nvSpPr>
+        <p:spPr>
+          <a:xfrm>
+            <a:off x="1855431" y="6094476"/>
+            <a:ext cx="91440" cy="50292"/>
+          </a:xfrm>
+          <a:prstGeom prst="rect">
+            <a:avLst/>
+          </a:prstGeom>
+          <a:solidFill>
+            <a:srgbClr val="7C90A6"/>
+          </a:solidFill>
+          <a:ln>
+            <a:noFill/>
+          </a:ln>
+          <a:effectLst/>
+        </p:spPr>
+        <p:style>
+          <a:lnRef idx="1">
+            <a:schemeClr val="accent1"/>
+          </a:lnRef>
+          <a:fillRef idx="3">
+            <a:schemeClr val="accent1"/>
+          </a:fillRef>
+          <a:effectRef idx="2">
+            <a:schemeClr val="accent1"/>
+          </a:effectRef>
+          <a:fontRef idx="minor">
+            <a:schemeClr val="lt1"/>
+          </a:fontRef>
+        </p:style>
+        <p:txBody>
+          <a:bodyPr rtlCol="0" anchor="ctr"/>
+          <a:lstStyle/>
+          <a:p>
+            <a:pPr algn="ctr"/>
+          </a:p>
+        </p:txBody>
+      </p:sp>
+      <p:sp>
+        <p:nvSpPr>
+          <p:cNvPr id="53" name="Rounded Rectangle 52"/>
           <p:cNvSpPr/>
           <p:nvPr/>
         </p:nvSpPr>
@@ -25208,7 +25296,7 @@
       </p:sp>
       <p:cxnSp>
         <p:nvCxnSpPr>
-          <p:cNvPr id="52" name="Connector 51"/>
+          <p:cNvPr id="54" name="Connector 53"/>
           <p:cNvCxnSpPr/>
           <p:nvPr/>
         </p:nvCxnSpPr>
@@ -25220,9 +25308,9 @@
           <a:prstGeom prst="line">
             <a:avLst/>
           </a:prstGeom>
-          <a:ln w="13970">
+          <a:ln w="20320">
             <a:solidFill>
-              <a:srgbClr val="E4EAF1"/>
+              <a:srgbClr val="7C90A6"/>
             </a:solidFill>
             <a:prstDash val="sysDash"/>
           </a:ln>
@@ -25245,7 +25333,95 @@
       </p:cxnSp>
       <p:sp>
         <p:nvSpPr>
-          <p:cNvPr id="53" name="Rounded Rectangle 52"/>
+          <p:cNvPr id="55" name="Rectangle 54"/>
+          <p:cNvSpPr/>
+          <p:nvPr/>
+        </p:nvSpPr>
+        <p:spPr>
+          <a:xfrm>
+            <a:off x="4651895" y="3913632"/>
+            <a:ext cx="91440" cy="50292"/>
+          </a:xfrm>
+          <a:prstGeom prst="rect">
+            <a:avLst/>
+          </a:prstGeom>
+          <a:solidFill>
+            <a:srgbClr val="7C90A6"/>
+          </a:solidFill>
+          <a:ln>
+            <a:noFill/>
+          </a:ln>
+          <a:effectLst/>
+        </p:spPr>
+        <p:style>
+          <a:lnRef idx="1">
+            <a:schemeClr val="accent1"/>
+          </a:lnRef>
+          <a:fillRef idx="3">
+            <a:schemeClr val="accent1"/>
+          </a:fillRef>
+          <a:effectRef idx="2">
+            <a:schemeClr val="accent1"/>
+          </a:effectRef>
+          <a:fontRef idx="minor">
+            <a:schemeClr val="lt1"/>
+          </a:fontRef>
+        </p:style>
+        <p:txBody>
+          <a:bodyPr rtlCol="0" anchor="ctr"/>
+          <a:lstStyle/>
+          <a:p>
+            <a:pPr algn="ctr"/>
+          </a:p>
+        </p:txBody>
+      </p:sp>
+      <p:sp>
+        <p:nvSpPr>
+          <p:cNvPr id="56" name="Rectangle 55"/>
+          <p:cNvSpPr/>
+          <p:nvPr/>
+        </p:nvSpPr>
+        <p:spPr>
+          <a:xfrm>
+            <a:off x="4651895" y="6094476"/>
+            <a:ext cx="91440" cy="50292"/>
+          </a:xfrm>
+          <a:prstGeom prst="rect">
+            <a:avLst/>
+          </a:prstGeom>
+          <a:solidFill>
+            <a:srgbClr val="7C90A6"/>
+          </a:solidFill>
+          <a:ln>
+            <a:noFill/>
+          </a:ln>
+          <a:effectLst/>
+        </p:spPr>
+        <p:style>
+          <a:lnRef idx="1">
+            <a:schemeClr val="accent1"/>
+          </a:lnRef>
+          <a:fillRef idx="3">
+            <a:schemeClr val="accent1"/>
+          </a:fillRef>
+          <a:effectRef idx="2">
+            <a:schemeClr val="accent1"/>
+          </a:effectRef>
+          <a:fontRef idx="minor">
+            <a:schemeClr val="lt1"/>
+          </a:fontRef>
+        </p:style>
+        <p:txBody>
+          <a:bodyPr rtlCol="0" anchor="ctr"/>
+          <a:lstStyle/>
+          <a:p>
+            <a:pPr algn="ctr"/>
+          </a:p>
+        </p:txBody>
+      </p:sp>
+      <p:sp>
+        <p:nvSpPr>
+          <p:cNvPr id="57" name="Rounded Rectangle 56"/>
           <p:cNvSpPr/>
           <p:nvPr/>
         </p:nvSpPr>
@@ -25300,7 +25476,7 @@
       </p:sp>
       <p:cxnSp>
         <p:nvCxnSpPr>
-          <p:cNvPr id="54" name="Connector 53"/>
+          <p:cNvPr id="58" name="Connector 57"/>
           <p:cNvCxnSpPr/>
           <p:nvPr/>
         </p:nvCxnSpPr>
@@ -25312,9 +25488,9 @@
           <a:prstGeom prst="line">
             <a:avLst/>
           </a:prstGeom>
-          <a:ln w="13970">
+          <a:ln w="20320">
             <a:solidFill>
-              <a:srgbClr val="E4EAF1"/>
+              <a:srgbClr val="7C90A6"/>
             </a:solidFill>
             <a:prstDash val="sysDash"/>
           </a:ln>
@@ -25337,7 +25513,95 @@
       </p:cxnSp>
       <p:sp>
         <p:nvSpPr>
-          <p:cNvPr id="55" name="Rounded Rectangle 54"/>
+          <p:cNvPr id="59" name="Rectangle 58"/>
+          <p:cNvSpPr/>
+          <p:nvPr/>
+        </p:nvSpPr>
+        <p:spPr>
+          <a:xfrm>
+            <a:off x="7448359" y="3913632"/>
+            <a:ext cx="91440" cy="50292"/>
+          </a:xfrm>
+          <a:prstGeom prst="rect">
+            <a:avLst/>
+          </a:prstGeom>
+          <a:solidFill>
+            <a:srgbClr val="7C90A6"/>
+          </a:solidFill>
+          <a:ln>
+            <a:noFill/>
+          </a:ln>
+          <a:effectLst/>
+        </p:spPr>
+        <p:style>
+          <a:lnRef idx="1">
+            <a:schemeClr val="accent1"/>
+          </a:lnRef>
+          <a:fillRef idx="3">
+            <a:schemeClr val="accent1"/>
+          </a:fillRef>
+          <a:effectRef idx="2">
+            <a:schemeClr val="accent1"/>
+          </a:effectRef>
+          <a:fontRef idx="minor">
+            <a:schemeClr val="lt1"/>
+          </a:fontRef>
+        </p:style>
+        <p:txBody>
+          <a:bodyPr rtlCol="0" anchor="ctr"/>
+          <a:lstStyle/>
+          <a:p>
+            <a:pPr algn="ctr"/>
+          </a:p>
+        </p:txBody>
+      </p:sp>
+      <p:sp>
+        <p:nvSpPr>
+          <p:cNvPr id="60" name="Rectangle 59"/>
+          <p:cNvSpPr/>
+          <p:nvPr/>
+        </p:nvSpPr>
+        <p:spPr>
+          <a:xfrm>
+            <a:off x="7448359" y="6094476"/>
+            <a:ext cx="91440" cy="50292"/>
+          </a:xfrm>
+          <a:prstGeom prst="rect">
+            <a:avLst/>
+          </a:prstGeom>
+          <a:solidFill>
+            <a:srgbClr val="7C90A6"/>
+          </a:solidFill>
+          <a:ln>
+            <a:noFill/>
+          </a:ln>
+          <a:effectLst/>
+        </p:spPr>
+        <p:style>
+          <a:lnRef idx="1">
+            <a:schemeClr val="accent1"/>
+          </a:lnRef>
+          <a:fillRef idx="3">
+            <a:schemeClr val="accent1"/>
+          </a:fillRef>
+          <a:effectRef idx="2">
+            <a:schemeClr val="accent1"/>
+          </a:effectRef>
+          <a:fontRef idx="minor">
+            <a:schemeClr val="lt1"/>
+          </a:fontRef>
+        </p:style>
+        <p:txBody>
+          <a:bodyPr rtlCol="0" anchor="ctr"/>
+          <a:lstStyle/>
+          <a:p>
+            <a:pPr algn="ctr"/>
+          </a:p>
+        </p:txBody>
+      </p:sp>
+      <p:sp>
+        <p:nvSpPr>
+          <p:cNvPr id="61" name="Rounded Rectangle 60"/>
           <p:cNvSpPr/>
           <p:nvPr/>
         </p:nvSpPr>
@@ -25392,7 +25656,7 @@
       </p:sp>
       <p:cxnSp>
         <p:nvCxnSpPr>
-          <p:cNvPr id="56" name="Connector 55"/>
+          <p:cNvPr id="62" name="Connector 61"/>
           <p:cNvCxnSpPr/>
           <p:nvPr/>
         </p:nvCxnSpPr>
@@ -25404,9 +25668,9 @@
           <a:prstGeom prst="line">
             <a:avLst/>
           </a:prstGeom>
-          <a:ln w="13970">
+          <a:ln w="20320">
             <a:solidFill>
-              <a:srgbClr val="E4EAF1"/>
+              <a:srgbClr val="7C90A6"/>
             </a:solidFill>
             <a:prstDash val="sysDash"/>
           </a:ln>
@@ -25427,9 +25691,97 @@
           </a:fontRef>
         </p:style>
       </p:cxnSp>
+      <p:sp>
+        <p:nvSpPr>
+          <p:cNvPr id="63" name="Rectangle 62"/>
+          <p:cNvSpPr/>
+          <p:nvPr/>
+        </p:nvSpPr>
+        <p:spPr>
+          <a:xfrm>
+            <a:off x="10244823" y="3913632"/>
+            <a:ext cx="91440" cy="50292"/>
+          </a:xfrm>
+          <a:prstGeom prst="rect">
+            <a:avLst/>
+          </a:prstGeom>
+          <a:solidFill>
+            <a:srgbClr val="7C90A6"/>
+          </a:solidFill>
+          <a:ln>
+            <a:noFill/>
+          </a:ln>
+          <a:effectLst/>
+        </p:spPr>
+        <p:style>
+          <a:lnRef idx="1">
+            <a:schemeClr val="accent1"/>
+          </a:lnRef>
+          <a:fillRef idx="3">
+            <a:schemeClr val="accent1"/>
+          </a:fillRef>
+          <a:effectRef idx="2">
+            <a:schemeClr val="accent1"/>
+          </a:effectRef>
+          <a:fontRef idx="minor">
+            <a:schemeClr val="lt1"/>
+          </a:fontRef>
+        </p:style>
+        <p:txBody>
+          <a:bodyPr rtlCol="0" anchor="ctr"/>
+          <a:lstStyle/>
+          <a:p>
+            <a:pPr algn="ctr"/>
+          </a:p>
+        </p:txBody>
+      </p:sp>
+      <p:sp>
+        <p:nvSpPr>
+          <p:cNvPr id="64" name="Rectangle 63"/>
+          <p:cNvSpPr/>
+          <p:nvPr/>
+        </p:nvSpPr>
+        <p:spPr>
+          <a:xfrm>
+            <a:off x="10244823" y="6094476"/>
+            <a:ext cx="91440" cy="50292"/>
+          </a:xfrm>
+          <a:prstGeom prst="rect">
+            <a:avLst/>
+          </a:prstGeom>
+          <a:solidFill>
+            <a:srgbClr val="7C90A6"/>
+          </a:solidFill>
+          <a:ln>
+            <a:noFill/>
+          </a:ln>
+          <a:effectLst/>
+        </p:spPr>
+        <p:style>
+          <a:lnRef idx="1">
+            <a:schemeClr val="accent1"/>
+          </a:lnRef>
+          <a:fillRef idx="3">
+            <a:schemeClr val="accent1"/>
+          </a:fillRef>
+          <a:effectRef idx="2">
+            <a:schemeClr val="accent1"/>
+          </a:effectRef>
+          <a:fontRef idx="minor">
+            <a:schemeClr val="lt1"/>
+          </a:fontRef>
+        </p:style>
+        <p:txBody>
+          <a:bodyPr rtlCol="0" anchor="ctr"/>
+          <a:lstStyle/>
+          <a:p>
+            <a:pPr algn="ctr"/>
+          </a:p>
+        </p:txBody>
+      </p:sp>
       <p:cxnSp>
         <p:nvCxnSpPr>
-          <p:cNvPr id="57" name="Connector 56"/>
+          <p:cNvPr id="65" name="Connector 64"/>
           <p:cNvCxnSpPr/>
           <p:nvPr/>
         </p:nvCxnSpPr>
@@ -25441,7 +25793,7 @@
           <a:prstGeom prst="line">
             <a:avLst/>
           </a:prstGeom>
-          <a:ln w="16510">
+          <a:ln w="17780">
             <a:solidFill>
               <a:srgbClr val="1D4E89"/>
             </a:solidFill>
@@ -25466,14 +25818,14 @@
       </p:cxnSp>
       <p:sp>
         <p:nvSpPr>
-          <p:cNvPr id="58" name="Rectangle 57"/>
+          <p:cNvPr id="66" name="Rectangle 65"/>
           <p:cNvSpPr/>
           <p:nvPr/>
         </p:nvSpPr>
         <p:spPr>
           <a:xfrm>
-            <a:off x="4778216" y="4082796"/>
-            <a:ext cx="2635262" cy="154487"/>
+            <a:off x="4796504" y="4082796"/>
+            <a:ext cx="2598686" cy="154487"/>
           </a:xfrm>
           <a:prstGeom prst="rect">
             <a:avLst/>
@@ -25510,14 +25862,14 @@
       </p:sp>
       <p:sp>
         <p:nvSpPr>
-          <p:cNvPr id="59" name="TextBox 58"/>
+          <p:cNvPr id="67" name="TextBox 66"/>
           <p:cNvSpPr txBox="1"/>
           <p:nvPr/>
         </p:nvSpPr>
         <p:spPr>
           <a:xfrm>
-            <a:off x="4833080" y="4096511"/>
-            <a:ext cx="2525534" cy="154487"/>
+            <a:off x="4842224" y="4096511"/>
+            <a:ext cx="2507246" cy="154487"/>
           </a:xfrm>
           <a:prstGeom prst="rect">
             <a:avLst/>
@@ -25564,7 +25916,7 @@
       </p:sp>
       <p:cxnSp>
         <p:nvCxnSpPr>
-          <p:cNvPr id="60" name="Connector 59"/>
+          <p:cNvPr id="68" name="Connector 67"/>
           <p:cNvCxnSpPr/>
           <p:nvPr/>
         </p:nvCxnSpPr>
@@ -25576,7 +25928,7 @@
           <a:prstGeom prst="line">
             <a:avLst/>
           </a:prstGeom>
-          <a:ln w="16510">
+          <a:ln w="17780">
             <a:solidFill>
               <a:srgbClr val="5B6B7F"/>
             </a:solidFill>
@@ -25602,14 +25954,14 @@
       </p:cxnSp>
       <p:sp>
         <p:nvSpPr>
-          <p:cNvPr id="61" name="Rectangle 60"/>
+          <p:cNvPr id="69" name="Rectangle 68"/>
           <p:cNvSpPr/>
           <p:nvPr/>
         </p:nvSpPr>
         <p:spPr>
           <a:xfrm>
-            <a:off x="4422990" y="4331970"/>
-            <a:ext cx="3345713" cy="154487"/>
+            <a:off x="4554531" y="4331970"/>
+            <a:ext cx="3082632" cy="154487"/>
           </a:xfrm>
           <a:prstGeom prst="rect">
             <a:avLst/>
@@ -25646,14 +25998,14 @@
       </p:sp>
       <p:sp>
         <p:nvSpPr>
-          <p:cNvPr id="62" name="TextBox 61"/>
+          <p:cNvPr id="70" name="TextBox 69"/>
           <p:cNvSpPr txBox="1"/>
           <p:nvPr/>
         </p:nvSpPr>
         <p:spPr>
           <a:xfrm>
-            <a:off x="4477854" y="4345686"/>
-            <a:ext cx="3235985" cy="154487"/>
+            <a:off x="4600251" y="4345686"/>
+            <a:ext cx="2991192" cy="154487"/>
           </a:xfrm>
           <a:prstGeom prst="rect">
             <a:avLst/>
@@ -25718,7 +26070,7 @@
       </p:sp>
       <p:cxnSp>
         <p:nvCxnSpPr>
-          <p:cNvPr id="63" name="Connector 62"/>
+          <p:cNvPr id="71" name="Connector 70"/>
           <p:cNvCxnSpPr/>
           <p:nvPr/>
         </p:nvCxnSpPr>
@@ -25730,7 +26082,7 @@
           <a:prstGeom prst="line">
             <a:avLst/>
           </a:prstGeom>
-          <a:ln w="16510">
+          <a:ln w="17780">
             <a:solidFill>
               <a:srgbClr val="5B6B7F"/>
             </a:solidFill>
@@ -25756,14 +26108,14 @@
       </p:cxnSp>
       <p:sp>
         <p:nvSpPr>
-          <p:cNvPr id="64" name="Rectangle 63"/>
+          <p:cNvPr id="72" name="Rectangle 71"/>
           <p:cNvSpPr/>
           <p:nvPr/>
         </p:nvSpPr>
         <p:spPr>
           <a:xfrm>
-            <a:off x="1873196" y="4581144"/>
-            <a:ext cx="2852375" cy="154487"/>
+            <a:off x="1949491" y="4581144"/>
+            <a:ext cx="2699785" cy="154487"/>
           </a:xfrm>
           <a:prstGeom prst="rect">
             <a:avLst/>
@@ -25800,14 +26152,14 @@
       </p:sp>
       <p:sp>
         <p:nvSpPr>
-          <p:cNvPr id="65" name="TextBox 64"/>
+          <p:cNvPr id="73" name="TextBox 72"/>
           <p:cNvSpPr txBox="1"/>
           <p:nvPr/>
         </p:nvSpPr>
         <p:spPr>
           <a:xfrm>
-            <a:off x="1928060" y="4594859"/>
-            <a:ext cx="2742647" cy="154487"/>
+            <a:off x="1995211" y="4594859"/>
+            <a:ext cx="2608345" cy="154487"/>
           </a:xfrm>
           <a:prstGeom prst="rect">
             <a:avLst/>
@@ -25863,7 +26215,7 @@
       </p:sp>
       <p:cxnSp>
         <p:nvCxnSpPr>
-          <p:cNvPr id="66" name="Connector 65"/>
+          <p:cNvPr id="74" name="Connector 73"/>
           <p:cNvCxnSpPr/>
           <p:nvPr/>
         </p:nvCxnSpPr>
@@ -25875,7 +26227,7 @@
           <a:prstGeom prst="line">
             <a:avLst/>
           </a:prstGeom>
-          <a:ln w="16510">
+          <a:ln w="17780">
             <a:solidFill>
               <a:srgbClr val="1D4E89"/>
             </a:solidFill>
@@ -25900,14 +26252,14 @@
       </p:cxnSp>
       <p:sp>
         <p:nvSpPr>
-          <p:cNvPr id="67" name="Rectangle 66"/>
+          <p:cNvPr id="75" name="Rectangle 74"/>
           <p:cNvSpPr/>
           <p:nvPr/>
         </p:nvSpPr>
         <p:spPr>
           <a:xfrm>
-            <a:off x="4459176" y="4830318"/>
-            <a:ext cx="3273342" cy="154487"/>
+            <a:off x="4477464" y="4830318"/>
+            <a:ext cx="3236766" cy="154487"/>
           </a:xfrm>
           <a:prstGeom prst="rect">
             <a:avLst/>
@@ -25944,14 +26296,14 @@
       </p:sp>
       <p:sp>
         <p:nvSpPr>
-          <p:cNvPr id="68" name="TextBox 67"/>
+          <p:cNvPr id="76" name="TextBox 75"/>
           <p:cNvSpPr txBox="1"/>
           <p:nvPr/>
         </p:nvSpPr>
         <p:spPr>
           <a:xfrm>
-            <a:off x="4514040" y="4844033"/>
-            <a:ext cx="3163614" cy="154487"/>
+            <a:off x="4523184" y="4844033"/>
+            <a:ext cx="3145326" cy="154487"/>
           </a:xfrm>
           <a:prstGeom prst="rect">
             <a:avLst/>
@@ -25998,7 +26350,7 @@
       </p:sp>
       <p:sp>
         <p:nvSpPr>
-          <p:cNvPr id="69" name="Rectangle 68"/>
+          <p:cNvPr id="77" name="Rectangle 76"/>
           <p:cNvSpPr/>
           <p:nvPr/>
         </p:nvSpPr>
@@ -26042,7 +26394,7 @@
       </p:sp>
       <p:cxnSp>
         <p:nvCxnSpPr>
-          <p:cNvPr id="70" name="Connector 69"/>
+          <p:cNvPr id="78" name="Connector 77"/>
           <p:cNvCxnSpPr/>
           <p:nvPr/>
         </p:nvCxnSpPr>
@@ -26079,14 +26431,14 @@
       </p:cxnSp>
       <p:sp>
         <p:nvSpPr>
-          <p:cNvPr id="71" name="Rectangle 70"/>
+          <p:cNvPr id="79" name="Rectangle 78"/>
           <p:cNvSpPr/>
           <p:nvPr/>
         </p:nvSpPr>
         <p:spPr>
           <a:xfrm>
             <a:off x="7804975" y="5079492"/>
-            <a:ext cx="3483768" cy="154487"/>
+            <a:ext cx="3352780" cy="154487"/>
           </a:xfrm>
           <a:prstGeom prst="rect">
             <a:avLst/>
@@ -26123,14 +26475,14 @@
       </p:sp>
       <p:sp>
         <p:nvSpPr>
-          <p:cNvPr id="72" name="TextBox 71"/>
+          <p:cNvPr id="80" name="TextBox 79"/>
           <p:cNvSpPr txBox="1"/>
           <p:nvPr/>
         </p:nvSpPr>
         <p:spPr>
           <a:xfrm>
-            <a:off x="7859839" y="5093207"/>
-            <a:ext cx="3374040" cy="154487"/>
+            <a:off x="7850695" y="5093207"/>
+            <a:ext cx="3261340" cy="154487"/>
           </a:xfrm>
           <a:prstGeom prst="rect">
             <a:avLst/>
@@ -26177,7 +26529,7 @@
       </p:sp>
       <p:cxnSp>
         <p:nvCxnSpPr>
-          <p:cNvPr id="73" name="Connector 72"/>
+          <p:cNvPr id="81" name="Connector 80"/>
           <p:cNvCxnSpPr/>
           <p:nvPr/>
         </p:nvCxnSpPr>
@@ -26189,7 +26541,7 @@
           <a:prstGeom prst="line">
             <a:avLst/>
           </a:prstGeom>
-          <a:ln w="16510">
+          <a:ln w="17780">
             <a:solidFill>
               <a:srgbClr val="1D4E89"/>
             </a:solidFill>
@@ -26214,14 +26566,14 @@
       </p:cxnSp>
       <p:sp>
         <p:nvSpPr>
-          <p:cNvPr id="74" name="Rectangle 73"/>
+          <p:cNvPr id="82" name="Rectangle 81"/>
           <p:cNvSpPr/>
           <p:nvPr/>
         </p:nvSpPr>
         <p:spPr>
           <a:xfrm>
-            <a:off x="7610589" y="5328666"/>
-            <a:ext cx="2563444" cy="154487"/>
+            <a:off x="7694066" y="5328666"/>
+            <a:ext cx="2396490" cy="154487"/>
           </a:xfrm>
           <a:prstGeom prst="rect">
             <a:avLst/>
@@ -26258,14 +26610,14 @@
       </p:sp>
       <p:sp>
         <p:nvSpPr>
-          <p:cNvPr id="75" name="TextBox 74"/>
+          <p:cNvPr id="83" name="TextBox 82"/>
           <p:cNvSpPr txBox="1"/>
           <p:nvPr/>
         </p:nvSpPr>
         <p:spPr>
           <a:xfrm>
-            <a:off x="7665453" y="5342381"/>
-            <a:ext cx="2453716" cy="154487"/>
+            <a:off x="7739786" y="5342381"/>
+            <a:ext cx="2305050" cy="154487"/>
           </a:xfrm>
           <a:prstGeom prst="rect">
             <a:avLst/>
@@ -26321,7 +26673,7 @@
       </p:sp>
       <p:cxnSp>
         <p:nvCxnSpPr>
-          <p:cNvPr id="76" name="Connector 75"/>
+          <p:cNvPr id="84" name="Connector 83"/>
           <p:cNvCxnSpPr/>
           <p:nvPr/>
         </p:nvCxnSpPr>
@@ -26333,7 +26685,7 @@
           <a:prstGeom prst="line">
             <a:avLst/>
           </a:prstGeom>
-          <a:ln w="16510">
+          <a:ln w="17780">
             <a:solidFill>
               <a:srgbClr val="5B6B7F"/>
             </a:solidFill>
@@ -26359,14 +26711,14 @@
       </p:cxnSp>
       <p:sp>
         <p:nvSpPr>
-          <p:cNvPr id="77" name="Rectangle 76"/>
+          <p:cNvPr id="85" name="Rectangle 84"/>
           <p:cNvSpPr/>
           <p:nvPr/>
         </p:nvSpPr>
         <p:spPr>
           <a:xfrm>
-            <a:off x="8067741" y="5577840"/>
-            <a:ext cx="1649139" cy="154487"/>
+            <a:off x="8086029" y="5577840"/>
+            <a:ext cx="1612563" cy="154487"/>
           </a:xfrm>
           <a:prstGeom prst="rect">
             <a:avLst/>
@@ -26403,14 +26755,14 @@
       </p:sp>
       <p:sp>
         <p:nvSpPr>
-          <p:cNvPr id="78" name="TextBox 77"/>
+          <p:cNvPr id="86" name="TextBox 85"/>
           <p:cNvSpPr txBox="1"/>
           <p:nvPr/>
         </p:nvSpPr>
         <p:spPr>
           <a:xfrm>
-            <a:off x="8122605" y="5591555"/>
-            <a:ext cx="1539411" cy="154487"/>
+            <a:off x="8131749" y="5591555"/>
+            <a:ext cx="1521123" cy="154487"/>
           </a:xfrm>
           <a:prstGeom prst="rect">
             <a:avLst/>
@@ -26457,7 +26809,7 @@
       </p:sp>
       <p:sp>
         <p:nvSpPr>
-          <p:cNvPr id="79" name="Rectangle 78"/>
+          <p:cNvPr id="87" name="Rectangle 86"/>
           <p:cNvSpPr/>
           <p:nvPr/>
         </p:nvSpPr>
@@ -26501,7 +26853,7 @@
       </p:sp>
       <p:cxnSp>
         <p:nvCxnSpPr>
-          <p:cNvPr id="80" name="Connector 79"/>
+          <p:cNvPr id="88" name="Connector 87"/>
           <p:cNvCxnSpPr/>
           <p:nvPr/>
         </p:nvCxnSpPr>
@@ -26538,14 +26890,14 @@
       </p:cxnSp>
       <p:sp>
         <p:nvSpPr>
-          <p:cNvPr id="81" name="Rectangle 80"/>
+          <p:cNvPr id="89" name="Rectangle 88"/>
           <p:cNvSpPr/>
           <p:nvPr/>
         </p:nvSpPr>
         <p:spPr>
           <a:xfrm>
-            <a:off x="7293863" y="5827014"/>
-            <a:ext cx="2941815" cy="154487"/>
+            <a:off x="7404963" y="5827014"/>
+            <a:ext cx="2830715" cy="154487"/>
           </a:xfrm>
           <a:prstGeom prst="rect">
             <a:avLst/>
@@ -26582,14 +26934,14 @@
       </p:sp>
       <p:sp>
         <p:nvSpPr>
-          <p:cNvPr id="82" name="TextBox 81"/>
+          <p:cNvPr id="90" name="TextBox 89"/>
           <p:cNvSpPr txBox="1"/>
           <p:nvPr/>
         </p:nvSpPr>
         <p:spPr>
           <a:xfrm>
-            <a:off x="7348727" y="5840729"/>
-            <a:ext cx="2832087" cy="154487"/>
+            <a:off x="7450683" y="5840729"/>
+            <a:ext cx="2739275" cy="154487"/>
           </a:xfrm>
           <a:prstGeom prst="rect">
             <a:avLst/>
@@ -26636,7 +26988,7 @@
       </p:sp>
       <p:sp>
         <p:nvSpPr>
-          <p:cNvPr id="83" name="TextBox 82"/>
+          <p:cNvPr id="91" name="TextBox 90"/>
           <p:cNvSpPr txBox="1"/>
           <p:nvPr/>
         </p:nvSpPr>
@@ -26681,7 +27033,7 @@
       </p:sp>
       <p:sp>
         <p:nvSpPr>
-          <p:cNvPr id="84" name="TextBox 83"/>
+          <p:cNvPr id="92" name="TextBox 91"/>
           <p:cNvSpPr txBox="1"/>
           <p:nvPr/>
         </p:nvSpPr>
@@ -49096,9 +49448,9 @@
           <a:prstGeom prst="line">
             <a:avLst/>
           </a:prstGeom>
-          <a:ln w="13970">
+          <a:ln w="20320">
             <a:solidFill>
-              <a:srgbClr val="E4EAF1"/>
+              <a:srgbClr val="7C90A6"/>
             </a:solidFill>
             <a:prstDash val="sysDash"/>
           </a:ln>
@@ -49121,7 +49473,95 @@
       </p:cxnSp>
       <p:sp>
         <p:nvSpPr>
-          <p:cNvPr id="8" name="Rounded Rectangle 7"/>
+          <p:cNvPr id="8" name="Rectangle 7"/>
+          <p:cNvSpPr/>
+          <p:nvPr/>
+        </p:nvSpPr>
+        <p:spPr>
+          <a:xfrm>
+            <a:off x="1575785" y="1682495"/>
+            <a:ext cx="91440" cy="50292"/>
+          </a:xfrm>
+          <a:prstGeom prst="rect">
+            <a:avLst/>
+          </a:prstGeom>
+          <a:solidFill>
+            <a:srgbClr val="7C90A6"/>
+          </a:solidFill>
+          <a:ln>
+            <a:noFill/>
+          </a:ln>
+          <a:effectLst/>
+        </p:spPr>
+        <p:style>
+          <a:lnRef idx="1">
+            <a:schemeClr val="accent1"/>
+          </a:lnRef>
+          <a:fillRef idx="3">
+            <a:schemeClr val="accent1"/>
+          </a:fillRef>
+          <a:effectRef idx="2">
+            <a:schemeClr val="accent1"/>
+          </a:effectRef>
+          <a:fontRef idx="minor">
+            <a:schemeClr val="lt1"/>
+          </a:fontRef>
+        </p:style>
+        <p:txBody>
+          <a:bodyPr rtlCol="0" anchor="ctr"/>
+          <a:lstStyle/>
+          <a:p>
+            <a:pPr algn="ctr"/>
+          </a:p>
+        </p:txBody>
+      </p:sp>
+      <p:sp>
+        <p:nvSpPr>
+          <p:cNvPr id="9" name="Rectangle 8"/>
+          <p:cNvSpPr/>
+          <p:nvPr/>
+        </p:nvSpPr>
+        <p:spPr>
+          <a:xfrm>
+            <a:off x="1575785" y="5180076"/>
+            <a:ext cx="91440" cy="50292"/>
+          </a:xfrm>
+          <a:prstGeom prst="rect">
+            <a:avLst/>
+          </a:prstGeom>
+          <a:solidFill>
+            <a:srgbClr val="7C90A6"/>
+          </a:solidFill>
+          <a:ln>
+            <a:noFill/>
+          </a:ln>
+          <a:effectLst/>
+        </p:spPr>
+        <p:style>
+          <a:lnRef idx="1">
+            <a:schemeClr val="accent1"/>
+          </a:lnRef>
+          <a:fillRef idx="3">
+            <a:schemeClr val="accent1"/>
+          </a:fillRef>
+          <a:effectRef idx="2">
+            <a:schemeClr val="accent1"/>
+          </a:effectRef>
+          <a:fontRef idx="minor">
+            <a:schemeClr val="lt1"/>
+          </a:fontRef>
+        </p:style>
+        <p:txBody>
+          <a:bodyPr rtlCol="0" anchor="ctr"/>
+          <a:lstStyle/>
+          <a:p>
+            <a:pPr algn="ctr"/>
+          </a:p>
+        </p:txBody>
+      </p:sp>
+      <p:sp>
+        <p:nvSpPr>
+          <p:cNvPr id="10" name="Rounded Rectangle 9"/>
           <p:cNvSpPr/>
           <p:nvPr/>
         </p:nvSpPr>
@@ -49176,7 +49616,7 @@
       </p:sp>
       <p:cxnSp>
         <p:nvCxnSpPr>
-          <p:cNvPr id="9" name="Connector 8"/>
+          <p:cNvPr id="11" name="Connector 10"/>
           <p:cNvCxnSpPr/>
           <p:nvPr/>
         </p:nvCxnSpPr>
@@ -49188,9 +49628,9 @@
           <a:prstGeom prst="line">
             <a:avLst/>
           </a:prstGeom>
-          <a:ln w="13970">
+          <a:ln w="20320">
             <a:solidFill>
-              <a:srgbClr val="E4EAF1"/>
+              <a:srgbClr val="7C90A6"/>
             </a:solidFill>
             <a:prstDash val="sysDash"/>
           </a:ln>
@@ -49213,7 +49653,95 @@
       </p:cxnSp>
       <p:sp>
         <p:nvSpPr>
-          <p:cNvPr id="10" name="Rounded Rectangle 9"/>
+          <p:cNvPr id="12" name="Rectangle 11"/>
+          <p:cNvSpPr/>
+          <p:nvPr/>
+        </p:nvSpPr>
+        <p:spPr>
+          <a:xfrm>
+            <a:off x="3812956" y="1682495"/>
+            <a:ext cx="91440" cy="50292"/>
+          </a:xfrm>
+          <a:prstGeom prst="rect">
+            <a:avLst/>
+          </a:prstGeom>
+          <a:solidFill>
+            <a:srgbClr val="7C90A6"/>
+          </a:solidFill>
+          <a:ln>
+            <a:noFill/>
+          </a:ln>
+          <a:effectLst/>
+        </p:spPr>
+        <p:style>
+          <a:lnRef idx="1">
+            <a:schemeClr val="accent1"/>
+          </a:lnRef>
+          <a:fillRef idx="3">
+            <a:schemeClr val="accent1"/>
+          </a:fillRef>
+          <a:effectRef idx="2">
+            <a:schemeClr val="accent1"/>
+          </a:effectRef>
+          <a:fontRef idx="minor">
+            <a:schemeClr val="lt1"/>
+          </a:fontRef>
+        </p:style>
+        <p:txBody>
+          <a:bodyPr rtlCol="0" anchor="ctr"/>
+          <a:lstStyle/>
+          <a:p>
+            <a:pPr algn="ctr"/>
+          </a:p>
+        </p:txBody>
+      </p:sp>
+      <p:sp>
+        <p:nvSpPr>
+          <p:cNvPr id="13" name="Rectangle 12"/>
+          <p:cNvSpPr/>
+          <p:nvPr/>
+        </p:nvSpPr>
+        <p:spPr>
+          <a:xfrm>
+            <a:off x="3812956" y="5180076"/>
+            <a:ext cx="91440" cy="50292"/>
+          </a:xfrm>
+          <a:prstGeom prst="rect">
+            <a:avLst/>
+          </a:prstGeom>
+          <a:solidFill>
+            <a:srgbClr val="7C90A6"/>
+          </a:solidFill>
+          <a:ln>
+            <a:noFill/>
+          </a:ln>
+          <a:effectLst/>
+        </p:spPr>
+        <p:style>
+          <a:lnRef idx="1">
+            <a:schemeClr val="accent1"/>
+          </a:lnRef>
+          <a:fillRef idx="3">
+            <a:schemeClr val="accent1"/>
+          </a:fillRef>
+          <a:effectRef idx="2">
+            <a:schemeClr val="accent1"/>
+          </a:effectRef>
+          <a:fontRef idx="minor">
+            <a:schemeClr val="lt1"/>
+          </a:fontRef>
+        </p:style>
+        <p:txBody>
+          <a:bodyPr rtlCol="0" anchor="ctr"/>
+          <a:lstStyle/>
+          <a:p>
+            <a:pPr algn="ctr"/>
+          </a:p>
+        </p:txBody>
+      </p:sp>
+      <p:sp>
+        <p:nvSpPr>
+          <p:cNvPr id="14" name="Rounded Rectangle 13"/>
           <p:cNvSpPr/>
           <p:nvPr/>
         </p:nvSpPr>
@@ -49268,7 +49796,7 @@
       </p:sp>
       <p:cxnSp>
         <p:nvCxnSpPr>
-          <p:cNvPr id="11" name="Connector 10"/>
+          <p:cNvPr id="15" name="Connector 14"/>
           <p:cNvCxnSpPr/>
           <p:nvPr/>
         </p:nvCxnSpPr>
@@ -49280,9 +49808,9 @@
           <a:prstGeom prst="line">
             <a:avLst/>
           </a:prstGeom>
-          <a:ln w="13970">
+          <a:ln w="20320">
             <a:solidFill>
-              <a:srgbClr val="E4EAF1"/>
+              <a:srgbClr val="7C90A6"/>
             </a:solidFill>
             <a:prstDash val="sysDash"/>
           </a:ln>
@@ -49305,7 +49833,95 @@
       </p:cxnSp>
       <p:sp>
         <p:nvSpPr>
-          <p:cNvPr id="12" name="Rounded Rectangle 11"/>
+          <p:cNvPr id="16" name="Rectangle 15"/>
+          <p:cNvSpPr/>
+          <p:nvPr/>
+        </p:nvSpPr>
+        <p:spPr>
+          <a:xfrm>
+            <a:off x="6050127" y="1682495"/>
+            <a:ext cx="91440" cy="50292"/>
+          </a:xfrm>
+          <a:prstGeom prst="rect">
+            <a:avLst/>
+          </a:prstGeom>
+          <a:solidFill>
+            <a:srgbClr val="7C90A6"/>
+          </a:solidFill>
+          <a:ln>
+            <a:noFill/>
+          </a:ln>
+          <a:effectLst/>
+        </p:spPr>
+        <p:style>
+          <a:lnRef idx="1">
+            <a:schemeClr val="accent1"/>
+          </a:lnRef>
+          <a:fillRef idx="3">
+            <a:schemeClr val="accent1"/>
+          </a:fillRef>
+          <a:effectRef idx="2">
+            <a:schemeClr val="accent1"/>
+          </a:effectRef>
+          <a:fontRef idx="minor">
+            <a:schemeClr val="lt1"/>
+          </a:fontRef>
+        </p:style>
+        <p:txBody>
+          <a:bodyPr rtlCol="0" anchor="ctr"/>
+          <a:lstStyle/>
+          <a:p>
+            <a:pPr algn="ctr"/>
+          </a:p>
+        </p:txBody>
+      </p:sp>
+      <p:sp>
+        <p:nvSpPr>
+          <p:cNvPr id="17" name="Rectangle 16"/>
+          <p:cNvSpPr/>
+          <p:nvPr/>
+        </p:nvSpPr>
+        <p:spPr>
+          <a:xfrm>
+            <a:off x="6050127" y="5180076"/>
+            <a:ext cx="91440" cy="50292"/>
+          </a:xfrm>
+          <a:prstGeom prst="rect">
+            <a:avLst/>
+          </a:prstGeom>
+          <a:solidFill>
+            <a:srgbClr val="7C90A6"/>
+          </a:solidFill>
+          <a:ln>
+            <a:noFill/>
+          </a:ln>
+          <a:effectLst/>
+        </p:spPr>
+        <p:style>
+          <a:lnRef idx="1">
+            <a:schemeClr val="accent1"/>
+          </a:lnRef>
+          <a:fillRef idx="3">
+            <a:schemeClr val="accent1"/>
+          </a:fillRef>
+          <a:effectRef idx="2">
+            <a:schemeClr val="accent1"/>
+          </a:effectRef>
+          <a:fontRef idx="minor">
+            <a:schemeClr val="lt1"/>
+          </a:fontRef>
+        </p:style>
+        <p:txBody>
+          <a:bodyPr rtlCol="0" anchor="ctr"/>
+          <a:lstStyle/>
+          <a:p>
+            <a:pPr algn="ctr"/>
+          </a:p>
+        </p:txBody>
+      </p:sp>
+      <p:sp>
+        <p:nvSpPr>
+          <p:cNvPr id="18" name="Rounded Rectangle 17"/>
           <p:cNvSpPr/>
           <p:nvPr/>
         </p:nvSpPr>
@@ -49360,7 +49976,7 @@
       </p:sp>
       <p:cxnSp>
         <p:nvCxnSpPr>
-          <p:cNvPr id="13" name="Connector 12"/>
+          <p:cNvPr id="19" name="Connector 18"/>
           <p:cNvCxnSpPr/>
           <p:nvPr/>
         </p:nvCxnSpPr>
@@ -49372,9 +49988,9 @@
           <a:prstGeom prst="line">
             <a:avLst/>
           </a:prstGeom>
-          <a:ln w="13970">
+          <a:ln w="20320">
             <a:solidFill>
-              <a:srgbClr val="E4EAF1"/>
+              <a:srgbClr val="7C90A6"/>
             </a:solidFill>
             <a:prstDash val="sysDash"/>
           </a:ln>
@@ -49397,7 +50013,95 @@
       </p:cxnSp>
       <p:sp>
         <p:nvSpPr>
-          <p:cNvPr id="14" name="Rounded Rectangle 13"/>
+          <p:cNvPr id="20" name="Rectangle 19"/>
+          <p:cNvSpPr/>
+          <p:nvPr/>
+        </p:nvSpPr>
+        <p:spPr>
+          <a:xfrm>
+            <a:off x="8287298" y="1682495"/>
+            <a:ext cx="91440" cy="50292"/>
+          </a:xfrm>
+          <a:prstGeom prst="rect">
+            <a:avLst/>
+          </a:prstGeom>
+          <a:solidFill>
+            <a:srgbClr val="7C90A6"/>
+          </a:solidFill>
+          <a:ln>
+            <a:noFill/>
+          </a:ln>
+          <a:effectLst/>
+        </p:spPr>
+        <p:style>
+          <a:lnRef idx="1">
+            <a:schemeClr val="accent1"/>
+          </a:lnRef>
+          <a:fillRef idx="3">
+            <a:schemeClr val="accent1"/>
+          </a:fillRef>
+          <a:effectRef idx="2">
+            <a:schemeClr val="accent1"/>
+          </a:effectRef>
+          <a:fontRef idx="minor">
+            <a:schemeClr val="lt1"/>
+          </a:fontRef>
+        </p:style>
+        <p:txBody>
+          <a:bodyPr rtlCol="0" anchor="ctr"/>
+          <a:lstStyle/>
+          <a:p>
+            <a:pPr algn="ctr"/>
+          </a:p>
+        </p:txBody>
+      </p:sp>
+      <p:sp>
+        <p:nvSpPr>
+          <p:cNvPr id="21" name="Rectangle 20"/>
+          <p:cNvSpPr/>
+          <p:nvPr/>
+        </p:nvSpPr>
+        <p:spPr>
+          <a:xfrm>
+            <a:off x="8287298" y="5180076"/>
+            <a:ext cx="91440" cy="50292"/>
+          </a:xfrm>
+          <a:prstGeom prst="rect">
+            <a:avLst/>
+          </a:prstGeom>
+          <a:solidFill>
+            <a:srgbClr val="7C90A6"/>
+          </a:solidFill>
+          <a:ln>
+            <a:noFill/>
+          </a:ln>
+          <a:effectLst/>
+        </p:spPr>
+        <p:style>
+          <a:lnRef idx="1">
+            <a:schemeClr val="accent1"/>
+          </a:lnRef>
+          <a:fillRef idx="3">
+            <a:schemeClr val="accent1"/>
+          </a:fillRef>
+          <a:effectRef idx="2">
+            <a:schemeClr val="accent1"/>
+          </a:effectRef>
+          <a:fontRef idx="minor">
+            <a:schemeClr val="lt1"/>
+          </a:fontRef>
+        </p:style>
+        <p:txBody>
+          <a:bodyPr rtlCol="0" anchor="ctr"/>
+          <a:lstStyle/>
+          <a:p>
+            <a:pPr algn="ctr"/>
+          </a:p>
+        </p:txBody>
+      </p:sp>
+      <p:sp>
+        <p:nvSpPr>
+          <p:cNvPr id="22" name="Rounded Rectangle 21"/>
           <p:cNvSpPr/>
           <p:nvPr/>
         </p:nvSpPr>
@@ -49452,7 +50156,7 @@
       </p:sp>
       <p:cxnSp>
         <p:nvCxnSpPr>
-          <p:cNvPr id="15" name="Connector 14"/>
+          <p:cNvPr id="23" name="Connector 22"/>
           <p:cNvCxnSpPr/>
           <p:nvPr/>
         </p:nvCxnSpPr>
@@ -49464,9 +50168,9 @@
           <a:prstGeom prst="line">
             <a:avLst/>
           </a:prstGeom>
-          <a:ln w="13970">
+          <a:ln w="20320">
             <a:solidFill>
-              <a:srgbClr val="E4EAF1"/>
+              <a:srgbClr val="7C90A6"/>
             </a:solidFill>
             <a:prstDash val="sysDash"/>
           </a:ln>
@@ -49487,9 +50191,97 @@
           </a:fontRef>
         </p:style>
       </p:cxnSp>
+      <p:sp>
+        <p:nvSpPr>
+          <p:cNvPr id="24" name="Rectangle 23"/>
+          <p:cNvSpPr/>
+          <p:nvPr/>
+        </p:nvSpPr>
+        <p:spPr>
+          <a:xfrm>
+            <a:off x="10524469" y="1682495"/>
+            <a:ext cx="91440" cy="50292"/>
+          </a:xfrm>
+          <a:prstGeom prst="rect">
+            <a:avLst/>
+          </a:prstGeom>
+          <a:solidFill>
+            <a:srgbClr val="7C90A6"/>
+          </a:solidFill>
+          <a:ln>
+            <a:noFill/>
+          </a:ln>
+          <a:effectLst/>
+        </p:spPr>
+        <p:style>
+          <a:lnRef idx="1">
+            <a:schemeClr val="accent1"/>
+          </a:lnRef>
+          <a:fillRef idx="3">
+            <a:schemeClr val="accent1"/>
+          </a:fillRef>
+          <a:effectRef idx="2">
+            <a:schemeClr val="accent1"/>
+          </a:effectRef>
+          <a:fontRef idx="minor">
+            <a:schemeClr val="lt1"/>
+          </a:fontRef>
+        </p:style>
+        <p:txBody>
+          <a:bodyPr rtlCol="0" anchor="ctr"/>
+          <a:lstStyle/>
+          <a:p>
+            <a:pPr algn="ctr"/>
+          </a:p>
+        </p:txBody>
+      </p:sp>
+      <p:sp>
+        <p:nvSpPr>
+          <p:cNvPr id="25" name="Rectangle 24"/>
+          <p:cNvSpPr/>
+          <p:nvPr/>
+        </p:nvSpPr>
+        <p:spPr>
+          <a:xfrm>
+            <a:off x="10524469" y="5180076"/>
+            <a:ext cx="91440" cy="50292"/>
+          </a:xfrm>
+          <a:prstGeom prst="rect">
+            <a:avLst/>
+          </a:prstGeom>
+          <a:solidFill>
+            <a:srgbClr val="7C90A6"/>
+          </a:solidFill>
+          <a:ln>
+            <a:noFill/>
+          </a:ln>
+          <a:effectLst/>
+        </p:spPr>
+        <p:style>
+          <a:lnRef idx="1">
+            <a:schemeClr val="accent1"/>
+          </a:lnRef>
+          <a:fillRef idx="3">
+            <a:schemeClr val="accent1"/>
+          </a:fillRef>
+          <a:effectRef idx="2">
+            <a:schemeClr val="accent1"/>
+          </a:effectRef>
+          <a:fontRef idx="minor">
+            <a:schemeClr val="lt1"/>
+          </a:fontRef>
+        </p:style>
+        <p:txBody>
+          <a:bodyPr rtlCol="0" anchor="ctr"/>
+          <a:lstStyle/>
+          <a:p>
+            <a:pPr algn="ctr"/>
+          </a:p>
+        </p:txBody>
+      </p:sp>
       <p:cxnSp>
         <p:nvCxnSpPr>
-          <p:cNvPr id="16" name="Connector 15"/>
+          <p:cNvPr id="26" name="Connector 25"/>
           <p:cNvCxnSpPr/>
           <p:nvPr/>
         </p:nvCxnSpPr>
@@ -49501,7 +50293,7 @@
           <a:prstGeom prst="line">
             <a:avLst/>
           </a:prstGeom>
-          <a:ln w="16510">
+          <a:ln w="17780">
             <a:solidFill>
               <a:srgbClr val="1D4E89"/>
             </a:solidFill>
@@ -49526,14 +50318,14 @@
       </p:cxnSp>
       <p:sp>
         <p:nvSpPr>
-          <p:cNvPr id="17" name="Rectangle 16"/>
+          <p:cNvPr id="27" name="Rectangle 26"/>
           <p:cNvSpPr/>
           <p:nvPr/>
         </p:nvSpPr>
         <p:spPr>
           <a:xfrm>
-            <a:off x="466997" y="1851660"/>
-            <a:ext cx="4546187" cy="157867"/>
+            <a:off x="599642" y="1851660"/>
+            <a:ext cx="4280896" cy="157867"/>
           </a:xfrm>
           <a:prstGeom prst="rect">
             <a:avLst/>
@@ -49570,14 +50362,14 @@
       </p:sp>
       <p:sp>
         <p:nvSpPr>
-          <p:cNvPr id="18" name="TextBox 17"/>
+          <p:cNvPr id="28" name="TextBox 27"/>
           <p:cNvSpPr txBox="1"/>
           <p:nvPr/>
         </p:nvSpPr>
         <p:spPr>
           <a:xfrm>
-            <a:off x="521861" y="1865376"/>
-            <a:ext cx="4436459" cy="157867"/>
+            <a:off x="645362" y="1865376"/>
+            <a:ext cx="4189456" cy="157867"/>
           </a:xfrm>
           <a:prstGeom prst="rect">
             <a:avLst/>
@@ -49651,7 +50443,7 @@
       </p:sp>
       <p:cxnSp>
         <p:nvCxnSpPr>
-          <p:cNvPr id="19" name="Connector 18"/>
+          <p:cNvPr id="29" name="Connector 28"/>
           <p:cNvCxnSpPr/>
           <p:nvPr/>
         </p:nvCxnSpPr>
@@ -49663,7 +50455,7 @@
           <a:prstGeom prst="line">
             <a:avLst/>
           </a:prstGeom>
-          <a:ln w="16510">
+          <a:ln w="17780">
             <a:solidFill>
               <a:srgbClr val="1D4E89"/>
             </a:solidFill>
@@ -49688,14 +50480,14 @@
       </p:cxnSp>
       <p:sp>
         <p:nvSpPr>
-          <p:cNvPr id="20" name="Rectangle 19"/>
+          <p:cNvPr id="30" name="Rectangle 29"/>
           <p:cNvSpPr/>
           <p:nvPr/>
         </p:nvSpPr>
         <p:spPr>
           <a:xfrm>
-            <a:off x="5239110" y="2106285"/>
-            <a:ext cx="3950646" cy="157867"/>
+            <a:off x="5319272" y="2106285"/>
+            <a:ext cx="3790321" cy="157867"/>
           </a:xfrm>
           <a:prstGeom prst="rect">
             <a:avLst/>
@@ -49732,14 +50524,14 @@
       </p:sp>
       <p:sp>
         <p:nvSpPr>
-          <p:cNvPr id="21" name="TextBox 20"/>
+          <p:cNvPr id="31" name="TextBox 30"/>
           <p:cNvSpPr txBox="1"/>
           <p:nvPr/>
         </p:nvSpPr>
         <p:spPr>
           <a:xfrm>
-            <a:off x="5293974" y="2120001"/>
-            <a:ext cx="3840918" cy="157867"/>
+            <a:off x="5364992" y="2120001"/>
+            <a:ext cx="3698881" cy="157867"/>
           </a:xfrm>
           <a:prstGeom prst="rect">
             <a:avLst/>
@@ -49804,7 +50596,7 @@
       </p:sp>
       <p:cxnSp>
         <p:nvCxnSpPr>
-          <p:cNvPr id="22" name="Connector 21"/>
+          <p:cNvPr id="32" name="Connector 31"/>
           <p:cNvCxnSpPr/>
           <p:nvPr/>
         </p:nvCxnSpPr>
@@ -49816,7 +50608,7 @@
           <a:prstGeom prst="line">
             <a:avLst/>
           </a:prstGeom>
-          <a:ln w="16510">
+          <a:ln w="17780">
             <a:solidFill>
               <a:srgbClr val="5B6B7F"/>
             </a:solidFill>
@@ -49842,14 +50634,14 @@
       </p:cxnSp>
       <p:sp>
         <p:nvSpPr>
-          <p:cNvPr id="23" name="Rectangle 22"/>
+          <p:cNvPr id="33" name="Rectangle 32"/>
           <p:cNvSpPr/>
           <p:nvPr/>
         </p:nvSpPr>
         <p:spPr>
           <a:xfrm>
-            <a:off x="5490751" y="2360910"/>
-            <a:ext cx="3447364" cy="157867"/>
+            <a:off x="5509039" y="2360910"/>
+            <a:ext cx="3410788" cy="157867"/>
           </a:xfrm>
           <a:prstGeom prst="rect">
             <a:avLst/>
@@ -49886,14 +50678,14 @@
       </p:sp>
       <p:sp>
         <p:nvSpPr>
-          <p:cNvPr id="24" name="TextBox 23"/>
+          <p:cNvPr id="34" name="TextBox 33"/>
           <p:cNvSpPr txBox="1"/>
           <p:nvPr/>
         </p:nvSpPr>
         <p:spPr>
           <a:xfrm>
-            <a:off x="5545615" y="2374626"/>
-            <a:ext cx="3337636" cy="157867"/>
+            <a:off x="5554759" y="2374626"/>
+            <a:ext cx="3319348" cy="157867"/>
           </a:xfrm>
           <a:prstGeom prst="rect">
             <a:avLst/>
@@ -49940,7 +50732,7 @@
       </p:sp>
       <p:cxnSp>
         <p:nvCxnSpPr>
-          <p:cNvPr id="25" name="Connector 24"/>
+          <p:cNvPr id="35" name="Connector 34"/>
           <p:cNvCxnSpPr/>
           <p:nvPr/>
         </p:nvCxnSpPr>
@@ -49952,7 +50744,7 @@
           <a:prstGeom prst="line">
             <a:avLst/>
           </a:prstGeom>
-          <a:ln w="16510">
+          <a:ln w="17780">
             <a:solidFill>
               <a:srgbClr val="1D4E89"/>
             </a:solidFill>
@@ -49977,14 +50769,14 @@
       </p:cxnSp>
       <p:sp>
         <p:nvSpPr>
-          <p:cNvPr id="26" name="Rectangle 25"/>
+          <p:cNvPr id="36" name="Rectangle 35"/>
           <p:cNvSpPr/>
           <p:nvPr/>
         </p:nvSpPr>
         <p:spPr>
           <a:xfrm>
-            <a:off x="3601623" y="2615535"/>
-            <a:ext cx="2751277" cy="157867"/>
+            <a:off x="3619911" y="2615535"/>
+            <a:ext cx="2714701" cy="157867"/>
           </a:xfrm>
           <a:prstGeom prst="rect">
             <a:avLst/>
@@ -50021,14 +50813,14 @@
       </p:sp>
       <p:sp>
         <p:nvSpPr>
-          <p:cNvPr id="27" name="TextBox 26"/>
+          <p:cNvPr id="37" name="TextBox 36"/>
           <p:cNvSpPr txBox="1"/>
           <p:nvPr/>
         </p:nvSpPr>
         <p:spPr>
           <a:xfrm>
-            <a:off x="3656487" y="2629251"/>
-            <a:ext cx="2641549" cy="157867"/>
+            <a:off x="3665631" y="2629251"/>
+            <a:ext cx="2623261" cy="157867"/>
           </a:xfrm>
           <a:prstGeom prst="rect">
             <a:avLst/>
@@ -50075,7 +50867,7 @@
       </p:sp>
       <p:cxnSp>
         <p:nvCxnSpPr>
-          <p:cNvPr id="28" name="Connector 27"/>
+          <p:cNvPr id="38" name="Connector 37"/>
           <p:cNvCxnSpPr/>
           <p:nvPr/>
         </p:nvCxnSpPr>
@@ -50087,7 +50879,7 @@
           <a:prstGeom prst="line">
             <a:avLst/>
           </a:prstGeom>
-          <a:ln w="16510">
+          <a:ln w="17780">
             <a:solidFill>
               <a:srgbClr val="5B6B7F"/>
             </a:solidFill>
@@ -50113,14 +50905,14 @@
       </p:cxnSp>
       <p:sp>
         <p:nvSpPr>
-          <p:cNvPr id="29" name="Rectangle 28"/>
+          <p:cNvPr id="39" name="Rectangle 38"/>
           <p:cNvSpPr/>
           <p:nvPr/>
         </p:nvSpPr>
         <p:spPr>
           <a:xfrm>
-            <a:off x="3862656" y="2870160"/>
-            <a:ext cx="2229211" cy="157867"/>
+            <a:off x="3880944" y="2870160"/>
+            <a:ext cx="2192635" cy="157867"/>
           </a:xfrm>
           <a:prstGeom prst="rect">
             <a:avLst/>
@@ -50157,14 +50949,14 @@
       </p:sp>
       <p:sp>
         <p:nvSpPr>
-          <p:cNvPr id="30" name="TextBox 29"/>
+          <p:cNvPr id="40" name="TextBox 39"/>
           <p:cNvSpPr txBox="1"/>
           <p:nvPr/>
         </p:nvSpPr>
         <p:spPr>
           <a:xfrm>
-            <a:off x="3917520" y="2883876"/>
-            <a:ext cx="2119483" cy="157867"/>
+            <a:off x="3926664" y="2883876"/>
+            <a:ext cx="2101195" cy="157867"/>
           </a:xfrm>
           <a:prstGeom prst="rect">
             <a:avLst/>
@@ -50211,7 +51003,7 @@
       </p:sp>
       <p:cxnSp>
         <p:nvCxnSpPr>
-          <p:cNvPr id="31" name="Connector 30"/>
+          <p:cNvPr id="41" name="Connector 40"/>
           <p:cNvCxnSpPr/>
           <p:nvPr/>
         </p:nvCxnSpPr>
@@ -50223,7 +51015,7 @@
           <a:prstGeom prst="line">
             <a:avLst/>
           </a:prstGeom>
-          <a:ln w="16510">
+          <a:ln w="17780">
             <a:solidFill>
               <a:srgbClr val="1D4E89"/>
             </a:solidFill>
@@ -50248,14 +51040,14 @@
       </p:cxnSp>
       <p:sp>
         <p:nvSpPr>
-          <p:cNvPr id="32" name="Rectangle 31"/>
+          <p:cNvPr id="42" name="Rectangle 41"/>
           <p:cNvSpPr/>
           <p:nvPr/>
         </p:nvSpPr>
         <p:spPr>
           <a:xfrm>
-            <a:off x="4488179" y="3124786"/>
-            <a:ext cx="3215335" cy="157867"/>
+            <a:off x="4609223" y="3124786"/>
+            <a:ext cx="2973247" cy="157867"/>
           </a:xfrm>
           <a:prstGeom prst="rect">
             <a:avLst/>
@@ -50292,14 +51084,14 @@
       </p:sp>
       <p:sp>
         <p:nvSpPr>
-          <p:cNvPr id="33" name="TextBox 32"/>
+          <p:cNvPr id="43" name="TextBox 42"/>
           <p:cNvSpPr txBox="1"/>
           <p:nvPr/>
         </p:nvSpPr>
         <p:spPr>
           <a:xfrm>
-            <a:off x="4543043" y="3138502"/>
-            <a:ext cx="3105607" cy="157867"/>
+            <a:off x="4654943" y="3138502"/>
+            <a:ext cx="2881807" cy="157867"/>
           </a:xfrm>
           <a:prstGeom prst="rect">
             <a:avLst/>
@@ -50364,7 +51156,7 @@
       </p:sp>
       <p:cxnSp>
         <p:nvCxnSpPr>
-          <p:cNvPr id="34" name="Connector 33"/>
+          <p:cNvPr id="44" name="Connector 43"/>
           <p:cNvCxnSpPr/>
           <p:nvPr/>
         </p:nvCxnSpPr>
@@ -50376,7 +51168,7 @@
           <a:prstGeom prst="line">
             <a:avLst/>
           </a:prstGeom>
-          <a:ln w="16510">
+          <a:ln w="17780">
             <a:solidFill>
               <a:srgbClr val="5B6B7F"/>
             </a:solidFill>
@@ -50402,14 +51194,14 @@
       </p:cxnSp>
       <p:sp>
         <p:nvSpPr>
-          <p:cNvPr id="35" name="Rectangle 34"/>
+          <p:cNvPr id="45" name="Rectangle 44"/>
           <p:cNvSpPr/>
           <p:nvPr/>
         </p:nvSpPr>
         <p:spPr>
           <a:xfrm>
-            <a:off x="4749212" y="3379411"/>
-            <a:ext cx="2693269" cy="157867"/>
+            <a:off x="4767500" y="3379411"/>
+            <a:ext cx="2656693" cy="157867"/>
           </a:xfrm>
           <a:prstGeom prst="rect">
             <a:avLst/>
@@ -50446,14 +51238,14 @@
       </p:sp>
       <p:sp>
         <p:nvSpPr>
-          <p:cNvPr id="36" name="TextBox 35"/>
+          <p:cNvPr id="46" name="TextBox 45"/>
           <p:cNvSpPr txBox="1"/>
           <p:nvPr/>
         </p:nvSpPr>
         <p:spPr>
           <a:xfrm>
-            <a:off x="4804076" y="3393127"/>
-            <a:ext cx="2583541" cy="157867"/>
+            <a:off x="4813220" y="3393127"/>
+            <a:ext cx="2565253" cy="157867"/>
           </a:xfrm>
           <a:prstGeom prst="rect">
             <a:avLst/>
@@ -50500,7 +51292,7 @@
       </p:sp>
       <p:sp>
         <p:nvSpPr>
-          <p:cNvPr id="37" name="Rectangle 36"/>
+          <p:cNvPr id="47" name="Rectangle 46"/>
           <p:cNvSpPr/>
           <p:nvPr/>
         </p:nvSpPr>
@@ -50544,7 +51336,7 @@
       </p:sp>
       <p:cxnSp>
         <p:nvCxnSpPr>
-          <p:cNvPr id="38" name="Connector 37"/>
+          <p:cNvPr id="48" name="Connector 47"/>
           <p:cNvCxnSpPr/>
           <p:nvPr/>
         </p:nvCxnSpPr>
@@ -50581,14 +51373,14 @@
       </p:cxnSp>
       <p:sp>
         <p:nvSpPr>
-          <p:cNvPr id="39" name="Rectangle 38"/>
+          <p:cNvPr id="49" name="Rectangle 48"/>
           <p:cNvSpPr/>
           <p:nvPr/>
         </p:nvSpPr>
         <p:spPr>
           <a:xfrm>
             <a:off x="4169572" y="3634036"/>
-            <a:ext cx="3905288" cy="157867"/>
+            <a:ext cx="3553320" cy="157867"/>
           </a:xfrm>
           <a:prstGeom prst="rect">
             <a:avLst/>
@@ -50625,14 +51417,14 @@
       </p:sp>
       <p:sp>
         <p:nvSpPr>
-          <p:cNvPr id="40" name="TextBox 39"/>
+          <p:cNvPr id="50" name="TextBox 49"/>
           <p:cNvSpPr txBox="1"/>
           <p:nvPr/>
         </p:nvSpPr>
         <p:spPr>
           <a:xfrm>
-            <a:off x="4224436" y="3647752"/>
-            <a:ext cx="3795560" cy="157867"/>
+            <a:off x="4215292" y="3647752"/>
+            <a:ext cx="3461880" cy="157867"/>
           </a:xfrm>
           <a:prstGeom prst="rect">
             <a:avLst/>
@@ -50697,7 +51489,7 @@
       </p:sp>
       <p:cxnSp>
         <p:nvCxnSpPr>
-          <p:cNvPr id="41" name="Connector 40"/>
+          <p:cNvPr id="51" name="Connector 50"/>
           <p:cNvCxnSpPr/>
           <p:nvPr/>
         </p:nvCxnSpPr>
@@ -50709,7 +51501,7 @@
           <a:prstGeom prst="line">
             <a:avLst/>
           </a:prstGeom>
-          <a:ln w="16510">
+          <a:ln w="17780">
             <a:solidFill>
               <a:srgbClr val="1D4E89"/>
             </a:solidFill>
@@ -50734,14 +51526,14 @@
       </p:cxnSp>
       <p:sp>
         <p:nvSpPr>
-          <p:cNvPr id="42" name="Rectangle 41"/>
+          <p:cNvPr id="52" name="Rectangle 51"/>
           <p:cNvSpPr/>
           <p:nvPr/>
         </p:nvSpPr>
         <p:spPr>
           <a:xfrm>
-            <a:off x="4430172" y="3888661"/>
-            <a:ext cx="3331349" cy="157867"/>
+            <a:off x="4448460" y="3888661"/>
+            <a:ext cx="3294773" cy="157867"/>
           </a:xfrm>
           <a:prstGeom prst="rect">
             <a:avLst/>
@@ -50778,14 +51570,14 @@
       </p:sp>
       <p:sp>
         <p:nvSpPr>
-          <p:cNvPr id="43" name="TextBox 42"/>
+          <p:cNvPr id="53" name="TextBox 52"/>
           <p:cNvSpPr txBox="1"/>
           <p:nvPr/>
         </p:nvSpPr>
         <p:spPr>
           <a:xfrm>
-            <a:off x="4485036" y="3902377"/>
-            <a:ext cx="3221621" cy="157867"/>
+            <a:off x="4494180" y="3902377"/>
+            <a:ext cx="3203333" cy="157867"/>
           </a:xfrm>
           <a:prstGeom prst="rect">
             <a:avLst/>
@@ -50832,7 +51624,7 @@
       </p:sp>
       <p:cxnSp>
         <p:nvCxnSpPr>
-          <p:cNvPr id="44" name="Connector 43"/>
+          <p:cNvPr id="54" name="Connector 53"/>
           <p:cNvCxnSpPr/>
           <p:nvPr/>
         </p:nvCxnSpPr>
@@ -50844,7 +51636,7 @@
           <a:prstGeom prst="line">
             <a:avLst/>
           </a:prstGeom>
-          <a:ln w="16510">
+          <a:ln w="17780">
             <a:solidFill>
               <a:srgbClr val="5B6B7F"/>
             </a:solidFill>
@@ -50870,14 +51662,14 @@
       </p:cxnSp>
       <p:sp>
         <p:nvSpPr>
-          <p:cNvPr id="45" name="Rectangle 44"/>
+          <p:cNvPr id="55" name="Rectangle 54"/>
           <p:cNvSpPr/>
           <p:nvPr/>
         </p:nvSpPr>
         <p:spPr>
           <a:xfrm>
-            <a:off x="4053125" y="4143287"/>
-            <a:ext cx="4085443" cy="157867"/>
+            <a:off x="4071413" y="4143287"/>
+            <a:ext cx="4048867" cy="157867"/>
           </a:xfrm>
           <a:prstGeom prst="rect">
             <a:avLst/>
@@ -50914,14 +51706,14 @@
       </p:sp>
       <p:sp>
         <p:nvSpPr>
-          <p:cNvPr id="46" name="TextBox 45"/>
+          <p:cNvPr id="56" name="TextBox 55"/>
           <p:cNvSpPr txBox="1"/>
           <p:nvPr/>
         </p:nvSpPr>
         <p:spPr>
           <a:xfrm>
-            <a:off x="4107989" y="4157003"/>
-            <a:ext cx="3975715" cy="157867"/>
+            <a:off x="4117133" y="4157003"/>
+            <a:ext cx="3957427" cy="157867"/>
           </a:xfrm>
           <a:prstGeom prst="rect">
             <a:avLst/>
@@ -50968,7 +51760,7 @@
       </p:sp>
       <p:cxnSp>
         <p:nvCxnSpPr>
-          <p:cNvPr id="47" name="Connector 46"/>
+          <p:cNvPr id="57" name="Connector 56"/>
           <p:cNvCxnSpPr/>
           <p:nvPr/>
         </p:nvCxnSpPr>
@@ -50980,7 +51772,7 @@
           <a:prstGeom prst="line">
             <a:avLst/>
           </a:prstGeom>
-          <a:ln w="16510">
+          <a:ln w="17780">
             <a:solidFill>
               <a:srgbClr val="1D4E89"/>
             </a:solidFill>
@@ -51005,14 +51797,14 @@
       </p:cxnSp>
       <p:sp>
         <p:nvSpPr>
-          <p:cNvPr id="48" name="Rectangle 47"/>
+          <p:cNvPr id="58" name="Rectangle 57"/>
           <p:cNvSpPr/>
           <p:nvPr/>
         </p:nvSpPr>
         <p:spPr>
           <a:xfrm>
-            <a:off x="4978077" y="4397912"/>
-            <a:ext cx="4472711" cy="157867"/>
+            <a:off x="5058239" y="4397912"/>
+            <a:ext cx="4312386" cy="157867"/>
           </a:xfrm>
           <a:prstGeom prst="rect">
             <a:avLst/>
@@ -51049,14 +51841,14 @@
       </p:sp>
       <p:sp>
         <p:nvSpPr>
-          <p:cNvPr id="49" name="TextBox 48"/>
+          <p:cNvPr id="59" name="TextBox 58"/>
           <p:cNvSpPr txBox="1"/>
           <p:nvPr/>
         </p:nvSpPr>
         <p:spPr>
           <a:xfrm>
-            <a:off x="5032941" y="4411628"/>
-            <a:ext cx="4362983" cy="157867"/>
+            <a:off x="5103959" y="4411628"/>
+            <a:ext cx="4220946" cy="157867"/>
           </a:xfrm>
           <a:prstGeom prst="rect">
             <a:avLst/>
@@ -51121,7 +51913,7 @@
       </p:sp>
       <p:cxnSp>
         <p:nvCxnSpPr>
-          <p:cNvPr id="50" name="Connector 49"/>
+          <p:cNvPr id="60" name="Connector 59"/>
           <p:cNvCxnSpPr/>
           <p:nvPr/>
         </p:nvCxnSpPr>
@@ -51133,7 +51925,7 @@
           <a:prstGeom prst="line">
             <a:avLst/>
           </a:prstGeom>
-          <a:ln w="16510">
+          <a:ln w="17780">
             <a:solidFill>
               <a:srgbClr val="1D4E89"/>
             </a:solidFill>
@@ -51158,14 +51950,14 @@
       </p:cxnSp>
       <p:sp>
         <p:nvSpPr>
-          <p:cNvPr id="51" name="Rectangle 50"/>
+          <p:cNvPr id="61" name="Rectangle 60"/>
           <p:cNvSpPr/>
           <p:nvPr/>
         </p:nvSpPr>
         <p:spPr>
           <a:xfrm>
-            <a:off x="4920070" y="4652537"/>
-            <a:ext cx="4588725" cy="157867"/>
+            <a:off x="5000232" y="4652537"/>
+            <a:ext cx="4428401" cy="157867"/>
           </a:xfrm>
           <a:prstGeom prst="rect">
             <a:avLst/>
@@ -51202,14 +51994,14 @@
       </p:sp>
       <p:sp>
         <p:nvSpPr>
-          <p:cNvPr id="52" name="TextBox 51"/>
+          <p:cNvPr id="62" name="TextBox 61"/>
           <p:cNvSpPr txBox="1"/>
           <p:nvPr/>
         </p:nvSpPr>
         <p:spPr>
           <a:xfrm>
-            <a:off x="4974934" y="4666253"/>
-            <a:ext cx="4478997" cy="157867"/>
+            <a:off x="5045952" y="4666253"/>
+            <a:ext cx="4336961" cy="157867"/>
           </a:xfrm>
           <a:prstGeom prst="rect">
             <a:avLst/>
@@ -51274,7 +52066,7 @@
       </p:sp>
       <p:cxnSp>
         <p:nvCxnSpPr>
-          <p:cNvPr id="53" name="Connector 52"/>
+          <p:cNvPr id="63" name="Connector 62"/>
           <p:cNvCxnSpPr/>
           <p:nvPr/>
         </p:nvCxnSpPr>
@@ -51286,7 +52078,7 @@
           <a:prstGeom prst="line">
             <a:avLst/>
           </a:prstGeom>
-          <a:ln w="16510">
+          <a:ln w="17780">
             <a:solidFill>
               <a:srgbClr val="5B6B7F"/>
             </a:solidFill>
@@ -51312,14 +52104,14 @@
       </p:cxnSp>
       <p:sp>
         <p:nvSpPr>
-          <p:cNvPr id="54" name="Rectangle 53"/>
+          <p:cNvPr id="64" name="Rectangle 63"/>
           <p:cNvSpPr/>
           <p:nvPr/>
         </p:nvSpPr>
         <p:spPr>
           <a:xfrm>
-            <a:off x="1248437" y="4907162"/>
-            <a:ext cx="2983306" cy="157867"/>
+            <a:off x="1266725" y="4907162"/>
+            <a:ext cx="2946730" cy="157867"/>
           </a:xfrm>
           <a:prstGeom prst="rect">
             <a:avLst/>
@@ -51356,14 +52148,14 @@
       </p:sp>
       <p:sp>
         <p:nvSpPr>
-          <p:cNvPr id="55" name="TextBox 54"/>
+          <p:cNvPr id="65" name="TextBox 64"/>
           <p:cNvSpPr txBox="1"/>
           <p:nvPr/>
         </p:nvSpPr>
         <p:spPr>
           <a:xfrm>
-            <a:off x="1303301" y="4920878"/>
-            <a:ext cx="2873578" cy="157867"/>
+            <a:off x="1312445" y="4920878"/>
+            <a:ext cx="2855290" cy="157867"/>
           </a:xfrm>
           <a:prstGeom prst="rect">
             <a:avLst/>
@@ -51410,7 +52202,7 @@
       </p:sp>
       <p:sp>
         <p:nvSpPr>
-          <p:cNvPr id="56" name="Rounded Rectangle 55"/>
+          <p:cNvPr id="66" name="Rounded Rectangle 65"/>
           <p:cNvSpPr/>
           <p:nvPr/>
         </p:nvSpPr>
@@ -51456,7 +52248,7 @@
       </p:sp>
       <p:sp>
         <p:nvSpPr>
-          <p:cNvPr id="57" name="Rectangle 56"/>
+          <p:cNvPr id="67" name="Rectangle 66"/>
           <p:cNvSpPr/>
           <p:nvPr/>
         </p:nvSpPr>
@@ -51500,7 +52292,7 @@
       </p:sp>
       <p:sp>
         <p:nvSpPr>
-          <p:cNvPr id="58" name="TextBox 57"/>
+          <p:cNvPr id="68" name="TextBox 67"/>
           <p:cNvSpPr txBox="1"/>
           <p:nvPr/>
         </p:nvSpPr>
@@ -51581,7 +52373,7 @@
       </p:sp>
       <p:sp>
         <p:nvSpPr>
-          <p:cNvPr id="59" name="TextBox 58"/>
+          <p:cNvPr id="69" name="TextBox 68"/>
           <p:cNvSpPr txBox="1"/>
           <p:nvPr/>
         </p:nvSpPr>
@@ -51626,7 +52418,7 @@
       </p:sp>
       <p:sp>
         <p:nvSpPr>
-          <p:cNvPr id="60" name="TextBox 59"/>
+          <p:cNvPr id="70" name="TextBox 69"/>
           <p:cNvSpPr txBox="1"/>
           <p:nvPr/>
         </p:nvSpPr>
@@ -51935,9 +52727,9 @@
           <a:prstGeom prst="line">
             <a:avLst/>
           </a:prstGeom>
-          <a:ln w="13970">
+          <a:ln w="20320">
             <a:solidFill>
-              <a:srgbClr val="E4EAF1"/>
+              <a:srgbClr val="7C90A6"/>
             </a:solidFill>
             <a:prstDash val="sysDash"/>
           </a:ln>
@@ -51960,7 +52752,95 @@
       </p:cxnSp>
       <p:sp>
         <p:nvSpPr>
-          <p:cNvPr id="8" name="Rounded Rectangle 7"/>
+          <p:cNvPr id="8" name="Rectangle 7"/>
+          <p:cNvSpPr/>
+          <p:nvPr/>
+        </p:nvSpPr>
+        <p:spPr>
+          <a:xfrm>
+            <a:off x="1575785" y="1642714"/>
+            <a:ext cx="91440" cy="46385"/>
+          </a:xfrm>
+          <a:prstGeom prst="rect">
+            <a:avLst/>
+          </a:prstGeom>
+          <a:solidFill>
+            <a:srgbClr val="7C90A6"/>
+          </a:solidFill>
+          <a:ln>
+            <a:noFill/>
+          </a:ln>
+          <a:effectLst/>
+        </p:spPr>
+        <p:style>
+          <a:lnRef idx="1">
+            <a:schemeClr val="accent1"/>
+          </a:lnRef>
+          <a:fillRef idx="3">
+            <a:schemeClr val="accent1"/>
+          </a:fillRef>
+          <a:effectRef idx="2">
+            <a:schemeClr val="accent1"/>
+          </a:effectRef>
+          <a:fontRef idx="minor">
+            <a:schemeClr val="lt1"/>
+          </a:fontRef>
+        </p:style>
+        <p:txBody>
+          <a:bodyPr rtlCol="0" anchor="ctr"/>
+          <a:lstStyle/>
+          <a:p>
+            <a:pPr algn="ctr"/>
+          </a:p>
+        </p:txBody>
+      </p:sp>
+      <p:sp>
+        <p:nvSpPr>
+          <p:cNvPr id="9" name="Rectangle 8"/>
+          <p:cNvSpPr/>
+          <p:nvPr/>
+        </p:nvSpPr>
+        <p:spPr>
+          <a:xfrm>
+            <a:off x="1575785" y="4362564"/>
+            <a:ext cx="91440" cy="46385"/>
+          </a:xfrm>
+          <a:prstGeom prst="rect">
+            <a:avLst/>
+          </a:prstGeom>
+          <a:solidFill>
+            <a:srgbClr val="7C90A6"/>
+          </a:solidFill>
+          <a:ln>
+            <a:noFill/>
+          </a:ln>
+          <a:effectLst/>
+        </p:spPr>
+        <p:style>
+          <a:lnRef idx="1">
+            <a:schemeClr val="accent1"/>
+          </a:lnRef>
+          <a:fillRef idx="3">
+            <a:schemeClr val="accent1"/>
+          </a:fillRef>
+          <a:effectRef idx="2">
+            <a:schemeClr val="accent1"/>
+          </a:effectRef>
+          <a:fontRef idx="minor">
+            <a:schemeClr val="lt1"/>
+          </a:fontRef>
+        </p:style>
+        <p:txBody>
+          <a:bodyPr rtlCol="0" anchor="ctr"/>
+          <a:lstStyle/>
+          <a:p>
+            <a:pPr algn="ctr"/>
+          </a:p>
+        </p:txBody>
+      </p:sp>
+      <p:sp>
+        <p:nvSpPr>
+          <p:cNvPr id="10" name="Rounded Rectangle 9"/>
           <p:cNvSpPr/>
           <p:nvPr/>
         </p:nvSpPr>
@@ -52015,7 +52895,7 @@
       </p:sp>
       <p:cxnSp>
         <p:nvCxnSpPr>
-          <p:cNvPr id="9" name="Connector 8"/>
+          <p:cNvPr id="11" name="Connector 10"/>
           <p:cNvCxnSpPr/>
           <p:nvPr/>
         </p:nvCxnSpPr>
@@ -52027,9 +52907,9 @@
           <a:prstGeom prst="line">
             <a:avLst/>
           </a:prstGeom>
-          <a:ln w="13970">
+          <a:ln w="20320">
             <a:solidFill>
-              <a:srgbClr val="E4EAF1"/>
+              <a:srgbClr val="7C90A6"/>
             </a:solidFill>
             <a:prstDash val="sysDash"/>
           </a:ln>
@@ -52052,7 +52932,95 @@
       </p:cxnSp>
       <p:sp>
         <p:nvSpPr>
-          <p:cNvPr id="10" name="Rounded Rectangle 9"/>
+          <p:cNvPr id="12" name="Rectangle 11"/>
+          <p:cNvSpPr/>
+          <p:nvPr/>
+        </p:nvSpPr>
+        <p:spPr>
+          <a:xfrm>
+            <a:off x="3812956" y="1642714"/>
+            <a:ext cx="91440" cy="46385"/>
+          </a:xfrm>
+          <a:prstGeom prst="rect">
+            <a:avLst/>
+          </a:prstGeom>
+          <a:solidFill>
+            <a:srgbClr val="7C90A6"/>
+          </a:solidFill>
+          <a:ln>
+            <a:noFill/>
+          </a:ln>
+          <a:effectLst/>
+        </p:spPr>
+        <p:style>
+          <a:lnRef idx="1">
+            <a:schemeClr val="accent1"/>
+          </a:lnRef>
+          <a:fillRef idx="3">
+            <a:schemeClr val="accent1"/>
+          </a:fillRef>
+          <a:effectRef idx="2">
+            <a:schemeClr val="accent1"/>
+          </a:effectRef>
+          <a:fontRef idx="minor">
+            <a:schemeClr val="lt1"/>
+          </a:fontRef>
+        </p:style>
+        <p:txBody>
+          <a:bodyPr rtlCol="0" anchor="ctr"/>
+          <a:lstStyle/>
+          <a:p>
+            <a:pPr algn="ctr"/>
+          </a:p>
+        </p:txBody>
+      </p:sp>
+      <p:sp>
+        <p:nvSpPr>
+          <p:cNvPr id="13" name="Rectangle 12"/>
+          <p:cNvSpPr/>
+          <p:nvPr/>
+        </p:nvSpPr>
+        <p:spPr>
+          <a:xfrm>
+            <a:off x="3812956" y="4362564"/>
+            <a:ext cx="91440" cy="46385"/>
+          </a:xfrm>
+          <a:prstGeom prst="rect">
+            <a:avLst/>
+          </a:prstGeom>
+          <a:solidFill>
+            <a:srgbClr val="7C90A6"/>
+          </a:solidFill>
+          <a:ln>
+            <a:noFill/>
+          </a:ln>
+          <a:effectLst/>
+        </p:spPr>
+        <p:style>
+          <a:lnRef idx="1">
+            <a:schemeClr val="accent1"/>
+          </a:lnRef>
+          <a:fillRef idx="3">
+            <a:schemeClr val="accent1"/>
+          </a:fillRef>
+          <a:effectRef idx="2">
+            <a:schemeClr val="accent1"/>
+          </a:effectRef>
+          <a:fontRef idx="minor">
+            <a:schemeClr val="lt1"/>
+          </a:fontRef>
+        </p:style>
+        <p:txBody>
+          <a:bodyPr rtlCol="0" anchor="ctr"/>
+          <a:lstStyle/>
+          <a:p>
+            <a:pPr algn="ctr"/>
+          </a:p>
+        </p:txBody>
+      </p:sp>
+      <p:sp>
+        <p:nvSpPr>
+          <p:cNvPr id="14" name="Rounded Rectangle 13"/>
           <p:cNvSpPr/>
           <p:nvPr/>
         </p:nvSpPr>
@@ -52107,7 +53075,7 @@
       </p:sp>
       <p:cxnSp>
         <p:nvCxnSpPr>
-          <p:cNvPr id="11" name="Connector 10"/>
+          <p:cNvPr id="15" name="Connector 14"/>
           <p:cNvCxnSpPr/>
           <p:nvPr/>
         </p:nvCxnSpPr>
@@ -52119,9 +53087,9 @@
           <a:prstGeom prst="line">
             <a:avLst/>
           </a:prstGeom>
-          <a:ln w="13970">
+          <a:ln w="20320">
             <a:solidFill>
-              <a:srgbClr val="E4EAF1"/>
+              <a:srgbClr val="7C90A6"/>
             </a:solidFill>
             <a:prstDash val="sysDash"/>
           </a:ln>
@@ -52144,7 +53112,95 @@
       </p:cxnSp>
       <p:sp>
         <p:nvSpPr>
-          <p:cNvPr id="12" name="Rounded Rectangle 11"/>
+          <p:cNvPr id="16" name="Rectangle 15"/>
+          <p:cNvSpPr/>
+          <p:nvPr/>
+        </p:nvSpPr>
+        <p:spPr>
+          <a:xfrm>
+            <a:off x="6050127" y="1642714"/>
+            <a:ext cx="91440" cy="46385"/>
+          </a:xfrm>
+          <a:prstGeom prst="rect">
+            <a:avLst/>
+          </a:prstGeom>
+          <a:solidFill>
+            <a:srgbClr val="7C90A6"/>
+          </a:solidFill>
+          <a:ln>
+            <a:noFill/>
+          </a:ln>
+          <a:effectLst/>
+        </p:spPr>
+        <p:style>
+          <a:lnRef idx="1">
+            <a:schemeClr val="accent1"/>
+          </a:lnRef>
+          <a:fillRef idx="3">
+            <a:schemeClr val="accent1"/>
+          </a:fillRef>
+          <a:effectRef idx="2">
+            <a:schemeClr val="accent1"/>
+          </a:effectRef>
+          <a:fontRef idx="minor">
+            <a:schemeClr val="lt1"/>
+          </a:fontRef>
+        </p:style>
+        <p:txBody>
+          <a:bodyPr rtlCol="0" anchor="ctr"/>
+          <a:lstStyle/>
+          <a:p>
+            <a:pPr algn="ctr"/>
+          </a:p>
+        </p:txBody>
+      </p:sp>
+      <p:sp>
+        <p:nvSpPr>
+          <p:cNvPr id="17" name="Rectangle 16"/>
+          <p:cNvSpPr/>
+          <p:nvPr/>
+        </p:nvSpPr>
+        <p:spPr>
+          <a:xfrm>
+            <a:off x="6050127" y="4362564"/>
+            <a:ext cx="91440" cy="46385"/>
+          </a:xfrm>
+          <a:prstGeom prst="rect">
+            <a:avLst/>
+          </a:prstGeom>
+          <a:solidFill>
+            <a:srgbClr val="7C90A6"/>
+          </a:solidFill>
+          <a:ln>
+            <a:noFill/>
+          </a:ln>
+          <a:effectLst/>
+        </p:spPr>
+        <p:style>
+          <a:lnRef idx="1">
+            <a:schemeClr val="accent1"/>
+          </a:lnRef>
+          <a:fillRef idx="3">
+            <a:schemeClr val="accent1"/>
+          </a:fillRef>
+          <a:effectRef idx="2">
+            <a:schemeClr val="accent1"/>
+          </a:effectRef>
+          <a:fontRef idx="minor">
+            <a:schemeClr val="lt1"/>
+          </a:fontRef>
+        </p:style>
+        <p:txBody>
+          <a:bodyPr rtlCol="0" anchor="ctr"/>
+          <a:lstStyle/>
+          <a:p>
+            <a:pPr algn="ctr"/>
+          </a:p>
+        </p:txBody>
+      </p:sp>
+      <p:sp>
+        <p:nvSpPr>
+          <p:cNvPr id="18" name="Rounded Rectangle 17"/>
           <p:cNvSpPr/>
           <p:nvPr/>
         </p:nvSpPr>
@@ -52199,7 +53255,7 @@
       </p:sp>
       <p:cxnSp>
         <p:nvCxnSpPr>
-          <p:cNvPr id="13" name="Connector 12"/>
+          <p:cNvPr id="19" name="Connector 18"/>
           <p:cNvCxnSpPr/>
           <p:nvPr/>
         </p:nvCxnSpPr>
@@ -52211,9 +53267,9 @@
           <a:prstGeom prst="line">
             <a:avLst/>
           </a:prstGeom>
-          <a:ln w="13970">
+          <a:ln w="20320">
             <a:solidFill>
-              <a:srgbClr val="E4EAF1"/>
+              <a:srgbClr val="7C90A6"/>
             </a:solidFill>
             <a:prstDash val="sysDash"/>
           </a:ln>
@@ -52236,7 +53292,95 @@
       </p:cxnSp>
       <p:sp>
         <p:nvSpPr>
-          <p:cNvPr id="14" name="Rounded Rectangle 13"/>
+          <p:cNvPr id="20" name="Rectangle 19"/>
+          <p:cNvSpPr/>
+          <p:nvPr/>
+        </p:nvSpPr>
+        <p:spPr>
+          <a:xfrm>
+            <a:off x="8287298" y="1642714"/>
+            <a:ext cx="91440" cy="46385"/>
+          </a:xfrm>
+          <a:prstGeom prst="rect">
+            <a:avLst/>
+          </a:prstGeom>
+          <a:solidFill>
+            <a:srgbClr val="7C90A6"/>
+          </a:solidFill>
+          <a:ln>
+            <a:noFill/>
+          </a:ln>
+          <a:effectLst/>
+        </p:spPr>
+        <p:style>
+          <a:lnRef idx="1">
+            <a:schemeClr val="accent1"/>
+          </a:lnRef>
+          <a:fillRef idx="3">
+            <a:schemeClr val="accent1"/>
+          </a:fillRef>
+          <a:effectRef idx="2">
+            <a:schemeClr val="accent1"/>
+          </a:effectRef>
+          <a:fontRef idx="minor">
+            <a:schemeClr val="lt1"/>
+          </a:fontRef>
+        </p:style>
+        <p:txBody>
+          <a:bodyPr rtlCol="0" anchor="ctr"/>
+          <a:lstStyle/>
+          <a:p>
+            <a:pPr algn="ctr"/>
+          </a:p>
+        </p:txBody>
+      </p:sp>
+      <p:sp>
+        <p:nvSpPr>
+          <p:cNvPr id="21" name="Rectangle 20"/>
+          <p:cNvSpPr/>
+          <p:nvPr/>
+        </p:nvSpPr>
+        <p:spPr>
+          <a:xfrm>
+            <a:off x="8287298" y="4362564"/>
+            <a:ext cx="91440" cy="46385"/>
+          </a:xfrm>
+          <a:prstGeom prst="rect">
+            <a:avLst/>
+          </a:prstGeom>
+          <a:solidFill>
+            <a:srgbClr val="7C90A6"/>
+          </a:solidFill>
+          <a:ln>
+            <a:noFill/>
+          </a:ln>
+          <a:effectLst/>
+        </p:spPr>
+        <p:style>
+          <a:lnRef idx="1">
+            <a:schemeClr val="accent1"/>
+          </a:lnRef>
+          <a:fillRef idx="3">
+            <a:schemeClr val="accent1"/>
+          </a:fillRef>
+          <a:effectRef idx="2">
+            <a:schemeClr val="accent1"/>
+          </a:effectRef>
+          <a:fontRef idx="minor">
+            <a:schemeClr val="lt1"/>
+          </a:fontRef>
+        </p:style>
+        <p:txBody>
+          <a:bodyPr rtlCol="0" anchor="ctr"/>
+          <a:lstStyle/>
+          <a:p>
+            <a:pPr algn="ctr"/>
+          </a:p>
+        </p:txBody>
+      </p:sp>
+      <p:sp>
+        <p:nvSpPr>
+          <p:cNvPr id="22" name="Rounded Rectangle 21"/>
           <p:cNvSpPr/>
           <p:nvPr/>
         </p:nvSpPr>
@@ -52291,7 +53435,7 @@
       </p:sp>
       <p:cxnSp>
         <p:nvCxnSpPr>
-          <p:cNvPr id="15" name="Connector 14"/>
+          <p:cNvPr id="23" name="Connector 22"/>
           <p:cNvCxnSpPr/>
           <p:nvPr/>
         </p:nvCxnSpPr>
@@ -52303,9 +53447,9 @@
           <a:prstGeom prst="line">
             <a:avLst/>
           </a:prstGeom>
-          <a:ln w="13970">
+          <a:ln w="20320">
             <a:solidFill>
-              <a:srgbClr val="E4EAF1"/>
+              <a:srgbClr val="7C90A6"/>
             </a:solidFill>
             <a:prstDash val="sysDash"/>
           </a:ln>
@@ -52326,9 +53470,97 @@
           </a:fontRef>
         </p:style>
       </p:cxnSp>
+      <p:sp>
+        <p:nvSpPr>
+          <p:cNvPr id="24" name="Rectangle 23"/>
+          <p:cNvSpPr/>
+          <p:nvPr/>
+        </p:nvSpPr>
+        <p:spPr>
+          <a:xfrm>
+            <a:off x="10524469" y="1642714"/>
+            <a:ext cx="91440" cy="46385"/>
+          </a:xfrm>
+          <a:prstGeom prst="rect">
+            <a:avLst/>
+          </a:prstGeom>
+          <a:solidFill>
+            <a:srgbClr val="7C90A6"/>
+          </a:solidFill>
+          <a:ln>
+            <a:noFill/>
+          </a:ln>
+          <a:effectLst/>
+        </p:spPr>
+        <p:style>
+          <a:lnRef idx="1">
+            <a:schemeClr val="accent1"/>
+          </a:lnRef>
+          <a:fillRef idx="3">
+            <a:schemeClr val="accent1"/>
+          </a:fillRef>
+          <a:effectRef idx="2">
+            <a:schemeClr val="accent1"/>
+          </a:effectRef>
+          <a:fontRef idx="minor">
+            <a:schemeClr val="lt1"/>
+          </a:fontRef>
+        </p:style>
+        <p:txBody>
+          <a:bodyPr rtlCol="0" anchor="ctr"/>
+          <a:lstStyle/>
+          <a:p>
+            <a:pPr algn="ctr"/>
+          </a:p>
+        </p:txBody>
+      </p:sp>
+      <p:sp>
+        <p:nvSpPr>
+          <p:cNvPr id="25" name="Rectangle 24"/>
+          <p:cNvSpPr/>
+          <p:nvPr/>
+        </p:nvSpPr>
+        <p:spPr>
+          <a:xfrm>
+            <a:off x="10524469" y="4362564"/>
+            <a:ext cx="91440" cy="46385"/>
+          </a:xfrm>
+          <a:prstGeom prst="rect">
+            <a:avLst/>
+          </a:prstGeom>
+          <a:solidFill>
+            <a:srgbClr val="7C90A6"/>
+          </a:solidFill>
+          <a:ln>
+            <a:noFill/>
+          </a:ln>
+          <a:effectLst/>
+        </p:spPr>
+        <p:style>
+          <a:lnRef idx="1">
+            <a:schemeClr val="accent1"/>
+          </a:lnRef>
+          <a:fillRef idx="3">
+            <a:schemeClr val="accent1"/>
+          </a:fillRef>
+          <a:effectRef idx="2">
+            <a:schemeClr val="accent1"/>
+          </a:effectRef>
+          <a:fontRef idx="minor">
+            <a:schemeClr val="lt1"/>
+          </a:fontRef>
+        </p:style>
+        <p:txBody>
+          <a:bodyPr rtlCol="0" anchor="ctr"/>
+          <a:lstStyle/>
+          <a:p>
+            <a:pPr algn="ctr"/>
+          </a:p>
+        </p:txBody>
+      </p:sp>
       <p:cxnSp>
         <p:nvCxnSpPr>
-          <p:cNvPr id="16" name="Connector 15"/>
+          <p:cNvPr id="26" name="Connector 25"/>
           <p:cNvCxnSpPr/>
           <p:nvPr/>
         </p:nvCxnSpPr>
@@ -52340,7 +53572,7 @@
           <a:prstGeom prst="line">
             <a:avLst/>
           </a:prstGeom>
-          <a:ln w="16510">
+          <a:ln w="17780">
             <a:solidFill>
               <a:srgbClr val="1D4E89"/>
             </a:solidFill>
@@ -52365,14 +53597,14 @@
       </p:cxnSp>
       <p:sp>
         <p:nvSpPr>
-          <p:cNvPr id="17" name="Rectangle 16"/>
+          <p:cNvPr id="27" name="Rectangle 26"/>
           <p:cNvSpPr/>
           <p:nvPr/>
         </p:nvSpPr>
         <p:spPr>
           <a:xfrm>
-            <a:off x="1014475" y="1798738"/>
-            <a:ext cx="3451231" cy="157911"/>
+            <a:off x="1096847" y="1798738"/>
+            <a:ext cx="3286486" cy="157911"/>
           </a:xfrm>
           <a:prstGeom prst="rect">
             <a:avLst/>
@@ -52409,14 +53641,14 @@
       </p:sp>
       <p:sp>
         <p:nvSpPr>
-          <p:cNvPr id="18" name="TextBox 17"/>
+          <p:cNvPr id="28" name="TextBox 27"/>
           <p:cNvSpPr txBox="1"/>
           <p:nvPr/>
         </p:nvSpPr>
         <p:spPr>
           <a:xfrm>
-            <a:off x="1069339" y="1811388"/>
-            <a:ext cx="3341503" cy="157911"/>
+            <a:off x="1142567" y="1811388"/>
+            <a:ext cx="3195046" cy="157911"/>
           </a:xfrm>
           <a:prstGeom prst="rect">
             <a:avLst/>
@@ -52472,7 +53704,7 @@
       </p:sp>
       <p:cxnSp>
         <p:nvCxnSpPr>
-          <p:cNvPr id="19" name="Connector 18"/>
+          <p:cNvPr id="29" name="Connector 28"/>
           <p:cNvCxnSpPr/>
           <p:nvPr/>
         </p:nvCxnSpPr>
@@ -52484,7 +53716,7 @@
           <a:prstGeom prst="line">
             <a:avLst/>
           </a:prstGeom>
-          <a:ln w="16510">
+          <a:ln w="17780">
             <a:solidFill>
               <a:srgbClr val="5B6B7F"/>
             </a:solidFill>
@@ -52510,14 +53742,14 @@
       </p:cxnSp>
       <p:sp>
         <p:nvSpPr>
-          <p:cNvPr id="20" name="Rectangle 19"/>
+          <p:cNvPr id="30" name="Rectangle 29"/>
           <p:cNvSpPr/>
           <p:nvPr/>
         </p:nvSpPr>
         <p:spPr>
           <a:xfrm>
-            <a:off x="757033" y="2053433"/>
-            <a:ext cx="3966114" cy="157911"/>
+            <a:off x="889678" y="2053433"/>
+            <a:ext cx="3700824" cy="157911"/>
           </a:xfrm>
           <a:prstGeom prst="rect">
             <a:avLst/>
@@ -52554,14 +53786,14 @@
       </p:sp>
       <p:sp>
         <p:nvSpPr>
-          <p:cNvPr id="21" name="TextBox 20"/>
+          <p:cNvPr id="31" name="TextBox 30"/>
           <p:cNvSpPr txBox="1"/>
           <p:nvPr/>
         </p:nvSpPr>
         <p:spPr>
           <a:xfrm>
-            <a:off x="811897" y="2066083"/>
-            <a:ext cx="3856386" cy="157911"/>
+            <a:off x="935398" y="2066083"/>
+            <a:ext cx="3609384" cy="157911"/>
           </a:xfrm>
           <a:prstGeom prst="rect">
             <a:avLst/>
@@ -52635,7 +53867,7 @@
       </p:sp>
       <p:cxnSp>
         <p:nvCxnSpPr>
-          <p:cNvPr id="22" name="Connector 21"/>
+          <p:cNvPr id="32" name="Connector 31"/>
           <p:cNvCxnSpPr/>
           <p:nvPr/>
         </p:nvCxnSpPr>
@@ -52647,7 +53879,7 @@
           <a:prstGeom prst="line">
             <a:avLst/>
           </a:prstGeom>
-          <a:ln w="16510">
+          <a:ln w="17780">
             <a:solidFill>
               <a:srgbClr val="1D4E89"/>
             </a:solidFill>
@@ -52672,14 +53904,14 @@
       </p:cxnSp>
       <p:sp>
         <p:nvSpPr>
-          <p:cNvPr id="23" name="Rectangle 22"/>
+          <p:cNvPr id="33" name="Rectangle 32"/>
           <p:cNvSpPr/>
           <p:nvPr/>
         </p:nvSpPr>
         <p:spPr>
           <a:xfrm>
-            <a:off x="2802077" y="2308129"/>
-            <a:ext cx="2113197" cy="157911"/>
+            <a:off x="2820365" y="2308129"/>
+            <a:ext cx="2076621" cy="157911"/>
           </a:xfrm>
           <a:prstGeom prst="rect">
             <a:avLst/>
@@ -52716,14 +53948,14 @@
       </p:sp>
       <p:sp>
         <p:nvSpPr>
-          <p:cNvPr id="24" name="TextBox 23"/>
+          <p:cNvPr id="34" name="TextBox 33"/>
           <p:cNvSpPr txBox="1"/>
           <p:nvPr/>
         </p:nvSpPr>
         <p:spPr>
           <a:xfrm>
-            <a:off x="2856941" y="2320779"/>
-            <a:ext cx="2003469" cy="157911"/>
+            <a:off x="2866085" y="2320779"/>
+            <a:ext cx="1985181" cy="157911"/>
           </a:xfrm>
           <a:prstGeom prst="rect">
             <a:avLst/>
@@ -52770,7 +54002,7 @@
       </p:sp>
       <p:cxnSp>
         <p:nvCxnSpPr>
-          <p:cNvPr id="25" name="Connector 24"/>
+          <p:cNvPr id="35" name="Connector 34"/>
           <p:cNvCxnSpPr/>
           <p:nvPr/>
         </p:nvCxnSpPr>
@@ -52782,7 +54014,7 @@
           <a:prstGeom prst="line">
             <a:avLst/>
           </a:prstGeom>
-          <a:ln w="16510">
+          <a:ln w="17780">
             <a:solidFill>
               <a:srgbClr val="1D4E89"/>
             </a:solidFill>
@@ -52807,14 +54039,14 @@
       </p:cxnSp>
       <p:sp>
         <p:nvSpPr>
-          <p:cNvPr id="26" name="Rectangle 25"/>
+          <p:cNvPr id="36" name="Rectangle 35"/>
           <p:cNvSpPr/>
           <p:nvPr/>
         </p:nvSpPr>
         <p:spPr>
           <a:xfrm>
-            <a:off x="6657123" y="2562825"/>
-            <a:ext cx="3351790" cy="157911"/>
+            <a:off x="6799160" y="2562825"/>
+            <a:ext cx="3067716" cy="157911"/>
           </a:xfrm>
           <a:prstGeom prst="rect">
             <a:avLst/>
@@ -52851,14 +54083,14 @@
       </p:sp>
       <p:sp>
         <p:nvSpPr>
-          <p:cNvPr id="27" name="TextBox 26"/>
+          <p:cNvPr id="37" name="TextBox 36"/>
           <p:cNvSpPr txBox="1"/>
           <p:nvPr/>
         </p:nvSpPr>
         <p:spPr>
           <a:xfrm>
-            <a:off x="6711987" y="2575476"/>
-            <a:ext cx="3242062" cy="157911"/>
+            <a:off x="6844880" y="2575476"/>
+            <a:ext cx="2976276" cy="157911"/>
           </a:xfrm>
           <a:prstGeom prst="rect">
             <a:avLst/>
@@ -52941,7 +54173,7 @@
       </p:sp>
       <p:cxnSp>
         <p:nvCxnSpPr>
-          <p:cNvPr id="28" name="Connector 27"/>
+          <p:cNvPr id="38" name="Connector 37"/>
           <p:cNvCxnSpPr/>
           <p:nvPr/>
         </p:nvCxnSpPr>
@@ -52953,7 +54185,7 @@
           <a:prstGeom prst="line">
             <a:avLst/>
           </a:prstGeom>
-          <a:ln w="16510">
+          <a:ln w="17780">
             <a:solidFill>
               <a:srgbClr val="5B6B7F"/>
             </a:solidFill>
@@ -52979,14 +54211,14 @@
       </p:cxnSp>
       <p:sp>
         <p:nvSpPr>
-          <p:cNvPr id="29" name="Rectangle 28"/>
+          <p:cNvPr id="39" name="Rectangle 38"/>
           <p:cNvSpPr/>
           <p:nvPr/>
         </p:nvSpPr>
         <p:spPr>
           <a:xfrm>
-            <a:off x="7160405" y="2817521"/>
-            <a:ext cx="2345226" cy="157911"/>
+            <a:off x="7178693" y="2817521"/>
+            <a:ext cx="2308650" cy="157911"/>
           </a:xfrm>
           <a:prstGeom prst="rect">
             <a:avLst/>
@@ -53023,14 +54255,14 @@
       </p:sp>
       <p:sp>
         <p:nvSpPr>
-          <p:cNvPr id="30" name="TextBox 29"/>
+          <p:cNvPr id="40" name="TextBox 39"/>
           <p:cNvSpPr txBox="1"/>
           <p:nvPr/>
         </p:nvSpPr>
         <p:spPr>
           <a:xfrm>
-            <a:off x="7215269" y="2830172"/>
-            <a:ext cx="2235498" cy="157911"/>
+            <a:off x="7224413" y="2830172"/>
+            <a:ext cx="2217210" cy="157911"/>
           </a:xfrm>
           <a:prstGeom prst="rect">
             <a:avLst/>
@@ -53077,7 +54309,7 @@
       </p:sp>
       <p:cxnSp>
         <p:nvCxnSpPr>
-          <p:cNvPr id="31" name="Connector 30"/>
+          <p:cNvPr id="41" name="Connector 40"/>
           <p:cNvCxnSpPr/>
           <p:nvPr/>
         </p:nvCxnSpPr>
@@ -53089,7 +54321,7 @@
           <a:prstGeom prst="line">
             <a:avLst/>
           </a:prstGeom>
-          <a:ln w="16510">
+          <a:ln w="17780">
             <a:solidFill>
               <a:srgbClr val="1D4E89"/>
             </a:solidFill>
@@ -53114,14 +54346,14 @@
       </p:cxnSp>
       <p:sp>
         <p:nvSpPr>
-          <p:cNvPr id="32" name="Rectangle 31"/>
+          <p:cNvPr id="42" name="Rectangle 41"/>
           <p:cNvSpPr/>
           <p:nvPr/>
         </p:nvSpPr>
         <p:spPr>
           <a:xfrm>
-            <a:off x="5751783" y="3072217"/>
-            <a:ext cx="2925298" cy="157911"/>
+            <a:off x="5770071" y="3072217"/>
+            <a:ext cx="2888722" cy="157911"/>
           </a:xfrm>
           <a:prstGeom prst="rect">
             <a:avLst/>
@@ -53158,14 +54390,14 @@
       </p:sp>
       <p:sp>
         <p:nvSpPr>
-          <p:cNvPr id="33" name="TextBox 32"/>
+          <p:cNvPr id="43" name="TextBox 42"/>
           <p:cNvSpPr txBox="1"/>
           <p:nvPr/>
         </p:nvSpPr>
         <p:spPr>
           <a:xfrm>
-            <a:off x="5806647" y="3084868"/>
-            <a:ext cx="2815570" cy="157911"/>
+            <a:off x="5815791" y="3084868"/>
+            <a:ext cx="2797282" cy="157911"/>
           </a:xfrm>
           <a:prstGeom prst="rect">
             <a:avLst/>
@@ -53212,7 +54444,7 @@
       </p:sp>
       <p:cxnSp>
         <p:nvCxnSpPr>
-          <p:cNvPr id="34" name="Connector 33"/>
+          <p:cNvPr id="44" name="Connector 43"/>
           <p:cNvCxnSpPr/>
           <p:nvPr/>
         </p:nvCxnSpPr>
@@ -53224,7 +54456,7 @@
           <a:prstGeom prst="line">
             <a:avLst/>
           </a:prstGeom>
-          <a:ln w="16510">
+          <a:ln w="17780">
             <a:solidFill>
               <a:srgbClr val="5B6B7F"/>
             </a:solidFill>
@@ -53250,14 +54482,14 @@
       </p:cxnSp>
       <p:sp>
         <p:nvSpPr>
-          <p:cNvPr id="35" name="Rectangle 34"/>
+          <p:cNvPr id="45" name="Rectangle 44"/>
           <p:cNvSpPr/>
           <p:nvPr/>
         </p:nvSpPr>
         <p:spPr>
           <a:xfrm>
-            <a:off x="6070823" y="3326912"/>
-            <a:ext cx="2287219" cy="157911"/>
+            <a:off x="6089111" y="3326912"/>
+            <a:ext cx="2250643" cy="157911"/>
           </a:xfrm>
           <a:prstGeom prst="rect">
             <a:avLst/>
@@ -53294,14 +54526,14 @@
       </p:sp>
       <p:sp>
         <p:nvSpPr>
-          <p:cNvPr id="36" name="TextBox 35"/>
+          <p:cNvPr id="46" name="TextBox 45"/>
           <p:cNvSpPr txBox="1"/>
           <p:nvPr/>
         </p:nvSpPr>
         <p:spPr>
           <a:xfrm>
-            <a:off x="6125687" y="3339563"/>
-            <a:ext cx="2177491" cy="157911"/>
+            <a:off x="6134831" y="3339563"/>
+            <a:ext cx="2159203" cy="157911"/>
           </a:xfrm>
           <a:prstGeom prst="rect">
             <a:avLst/>
@@ -53348,7 +54580,7 @@
       </p:sp>
       <p:sp>
         <p:nvSpPr>
-          <p:cNvPr id="37" name="Rectangle 36"/>
+          <p:cNvPr id="47" name="Rectangle 46"/>
           <p:cNvSpPr/>
           <p:nvPr/>
         </p:nvSpPr>
@@ -53392,7 +54624,7 @@
       </p:sp>
       <p:cxnSp>
         <p:nvCxnSpPr>
-          <p:cNvPr id="38" name="Connector 37"/>
+          <p:cNvPr id="48" name="Connector 47"/>
           <p:cNvCxnSpPr/>
           <p:nvPr/>
         </p:nvCxnSpPr>
@@ -53429,14 +54661,14 @@
       </p:cxnSp>
       <p:sp>
         <p:nvSpPr>
-          <p:cNvPr id="39" name="Rectangle 38"/>
+          <p:cNvPr id="49" name="Rectangle 48"/>
           <p:cNvSpPr/>
           <p:nvPr/>
         </p:nvSpPr>
         <p:spPr>
           <a:xfrm>
             <a:off x="6406743" y="3581609"/>
-            <a:ext cx="3242900" cy="157911"/>
+            <a:ext cx="3120751" cy="157911"/>
           </a:xfrm>
           <a:prstGeom prst="rect">
             <a:avLst/>
@@ -53473,14 +54705,14 @@
       </p:sp>
       <p:sp>
         <p:nvSpPr>
-          <p:cNvPr id="40" name="TextBox 39"/>
+          <p:cNvPr id="50" name="TextBox 49"/>
           <p:cNvSpPr txBox="1"/>
           <p:nvPr/>
         </p:nvSpPr>
         <p:spPr>
           <a:xfrm>
-            <a:off x="6461607" y="3594259"/>
-            <a:ext cx="3133172" cy="157911"/>
+            <a:off x="6452463" y="3594259"/>
+            <a:ext cx="3029311" cy="157911"/>
           </a:xfrm>
           <a:prstGeom prst="rect">
             <a:avLst/>
@@ -53527,7 +54759,7 @@
       </p:sp>
       <p:cxnSp>
         <p:nvCxnSpPr>
-          <p:cNvPr id="41" name="Connector 40"/>
+          <p:cNvPr id="51" name="Connector 50"/>
           <p:cNvCxnSpPr/>
           <p:nvPr/>
         </p:nvCxnSpPr>
@@ -53539,7 +54771,7 @@
           <a:prstGeom prst="line">
             <a:avLst/>
           </a:prstGeom>
-          <a:ln w="16510">
+          <a:ln w="17780">
             <a:solidFill>
               <a:srgbClr val="5B6B7F"/>
             </a:solidFill>
@@ -53565,14 +54797,14 @@
       </p:cxnSp>
       <p:sp>
         <p:nvSpPr>
-          <p:cNvPr id="42" name="Rectangle 41"/>
+          <p:cNvPr id="52" name="Rectangle 51"/>
           <p:cNvSpPr/>
           <p:nvPr/>
         </p:nvSpPr>
         <p:spPr>
           <a:xfrm>
-            <a:off x="2460939" y="3836305"/>
-            <a:ext cx="2795473" cy="157911"/>
+            <a:off x="2544417" y="3836305"/>
+            <a:ext cx="2628519" cy="157911"/>
           </a:xfrm>
           <a:prstGeom prst="rect">
             <a:avLst/>
@@ -53609,14 +54841,14 @@
       </p:sp>
       <p:sp>
         <p:nvSpPr>
-          <p:cNvPr id="43" name="TextBox 42"/>
+          <p:cNvPr id="53" name="TextBox 52"/>
           <p:cNvSpPr txBox="1"/>
           <p:nvPr/>
         </p:nvSpPr>
         <p:spPr>
           <a:xfrm>
-            <a:off x="2515803" y="3848955"/>
-            <a:ext cx="2685745" cy="157911"/>
+            <a:off x="2590137" y="3848955"/>
+            <a:ext cx="2537079" cy="157911"/>
           </a:xfrm>
           <a:prstGeom prst="rect">
             <a:avLst/>
@@ -53681,7 +54913,7 @@
       </p:sp>
       <p:sp>
         <p:nvSpPr>
-          <p:cNvPr id="44" name="Rectangle 43"/>
+          <p:cNvPr id="54" name="Rectangle 53"/>
           <p:cNvSpPr/>
           <p:nvPr/>
         </p:nvSpPr>
@@ -53725,7 +54957,7 @@
       </p:sp>
       <p:cxnSp>
         <p:nvCxnSpPr>
-          <p:cNvPr id="45" name="Connector 44"/>
+          <p:cNvPr id="55" name="Connector 54"/>
           <p:cNvCxnSpPr/>
           <p:nvPr/>
         </p:nvCxnSpPr>
@@ -53762,14 +54994,14 @@
       </p:cxnSp>
       <p:sp>
         <p:nvSpPr>
-          <p:cNvPr id="46" name="Rectangle 45"/>
+          <p:cNvPr id="56" name="Rectangle 55"/>
           <p:cNvSpPr/>
           <p:nvPr/>
         </p:nvSpPr>
         <p:spPr>
           <a:xfrm>
             <a:off x="1932401" y="4091001"/>
-            <a:ext cx="3062249" cy="157911"/>
+            <a:ext cx="2946730" cy="157911"/>
           </a:xfrm>
           <a:prstGeom prst="rect">
             <a:avLst/>
@@ -53806,14 +55038,14 @@
       </p:sp>
       <p:sp>
         <p:nvSpPr>
-          <p:cNvPr id="47" name="TextBox 46"/>
+          <p:cNvPr id="57" name="TextBox 56"/>
           <p:cNvSpPr txBox="1"/>
           <p:nvPr/>
         </p:nvSpPr>
         <p:spPr>
           <a:xfrm>
-            <a:off x="1987265" y="4103651"/>
-            <a:ext cx="2952521" cy="157911"/>
+            <a:off x="1978121" y="4103651"/>
+            <a:ext cx="2855290" cy="157911"/>
           </a:xfrm>
           <a:prstGeom prst="rect">
             <a:avLst/>
@@ -53860,7 +55092,7 @@
       </p:sp>
       <p:sp>
         <p:nvSpPr>
-          <p:cNvPr id="48" name="Rounded Rectangle 47"/>
+          <p:cNvPr id="58" name="Rounded Rectangle 57"/>
           <p:cNvSpPr/>
           <p:nvPr/>
         </p:nvSpPr>
@@ -53906,7 +55138,7 @@
       </p:sp>
       <p:sp>
         <p:nvSpPr>
-          <p:cNvPr id="49" name="TextBox 48"/>
+          <p:cNvPr id="59" name="TextBox 58"/>
           <p:cNvSpPr txBox="1"/>
           <p:nvPr/>
         </p:nvSpPr>
@@ -54061,7 +55293,7 @@
       </p:sp>
       <p:sp>
         <p:nvSpPr>
-          <p:cNvPr id="50" name="Oval 49"/>
+          <p:cNvPr id="60" name="Oval 59"/>
           <p:cNvSpPr/>
           <p:nvPr/>
         </p:nvSpPr>
@@ -54105,7 +55337,7 @@
       </p:sp>
       <p:sp>
         <p:nvSpPr>
-          <p:cNvPr id="51" name="TextBox 50"/>
+          <p:cNvPr id="61" name="TextBox 60"/>
           <p:cNvSpPr txBox="1"/>
           <p:nvPr/>
         </p:nvSpPr>
@@ -54150,7 +55382,7 @@
       </p:sp>
       <p:sp>
         <p:nvSpPr>
-          <p:cNvPr id="52" name="Oval 51"/>
+          <p:cNvPr id="62" name="Oval 61"/>
           <p:cNvSpPr/>
           <p:nvPr/>
         </p:nvSpPr>
@@ -54194,7 +55426,7 @@
       </p:sp>
       <p:sp>
         <p:nvSpPr>
-          <p:cNvPr id="53" name="TextBox 52"/>
+          <p:cNvPr id="63" name="TextBox 62"/>
           <p:cNvSpPr txBox="1"/>
           <p:nvPr/>
         </p:nvSpPr>
@@ -54293,7 +55525,7 @@
       </p:sp>
       <p:sp>
         <p:nvSpPr>
-          <p:cNvPr id="54" name="Oval 53"/>
+          <p:cNvPr id="64" name="Oval 63"/>
           <p:cNvSpPr/>
           <p:nvPr/>
         </p:nvSpPr>
@@ -54337,7 +55569,7 @@
       </p:sp>
       <p:sp>
         <p:nvSpPr>
-          <p:cNvPr id="55" name="TextBox 54"/>
+          <p:cNvPr id="65" name="TextBox 64"/>
           <p:cNvSpPr txBox="1"/>
           <p:nvPr/>
         </p:nvSpPr>
@@ -54418,7 +55650,7 @@
       </p:sp>
       <p:sp>
         <p:nvSpPr>
-          <p:cNvPr id="56" name="Oval 55"/>
+          <p:cNvPr id="66" name="Oval 65"/>
           <p:cNvSpPr/>
           <p:nvPr/>
         </p:nvSpPr>
@@ -54462,7 +55694,7 @@
       </p:sp>
       <p:sp>
         <p:nvSpPr>
-          <p:cNvPr id="57" name="TextBox 56"/>
+          <p:cNvPr id="67" name="TextBox 66"/>
           <p:cNvSpPr txBox="1"/>
           <p:nvPr/>
         </p:nvSpPr>
@@ -54507,7 +55739,7 @@
       </p:sp>
       <p:sp>
         <p:nvSpPr>
-          <p:cNvPr id="58" name="TextBox 57"/>
+          <p:cNvPr id="68" name="TextBox 67"/>
           <p:cNvSpPr txBox="1"/>
           <p:nvPr/>
         </p:nvSpPr>
@@ -54552,7 +55784,7 @@
       </p:sp>
       <p:sp>
         <p:nvSpPr>
-          <p:cNvPr id="59" name="TextBox 58"/>
+          <p:cNvPr id="69" name="TextBox 68"/>
           <p:cNvSpPr txBox="1"/>
           <p:nvPr/>
         </p:nvSpPr>
